--- a/assets/figures-editable/c3-c4/c3-e26.pptx
+++ b/assets/figures-editable/c3-c4/c3-e26.pptx
@@ -3104,8 +3104,8 @@
         </p:nvSpPr>
         <p:spPr>
           <a:xfrm>
-            <a:off x="274320" y="137160"/>
-            <a:ext cx="11612880" cy="365760"/>
+            <a:off x="274320" y="118872"/>
+            <a:ext cx="11612880" cy="340105"/>
           </a:xfrm>
           <a:prstGeom prst="rect">
             <a:avLst/>
@@ -3114,7 +3114,7 @@
           <a:effectLst/>
         </p:spPr>
         <p:txBody>
-          <a:bodyPr wrap="square" lIns="27432" rIns="27432" tIns="18288" bIns="18288" anchor="ctr">
+          <a:bodyPr wrap="none" lIns="18288" rIns="18288" tIns="18288" bIns="18288" anchor="t">
             <a:spAutoFit/>
           </a:bodyPr>
           <a:lstStyle/>
@@ -3125,7 +3125,7 @@
               </a:spcAft>
             </a:pPr>
             <a:r>
-              <a:rPr sz="2100" b="0" i="0">
+              <a:rPr sz="1900" b="1" i="0">
                 <a:solidFill>
                   <a:srgbClr val="8EDBD4"/>
                 </a:solidFill>
@@ -3136,23 +3136,20 @@
           </a:p>
         </p:txBody>
       </p:sp>
-      <p:sp>
-        <p:nvSpPr>
-          <p:cNvPr id="3" name="C3-E26 rect 1" descr="sci-ppt:o001"/>
-          <p:cNvSpPr/>
+      <p:cxnSp>
+        <p:nvCxnSpPr>
+          <p:cNvPr id="3" name="C3-E26 line 1" descr="sci-ppt:o001"/>
+          <p:cNvCxnSpPr/>
           <p:nvPr/>
-        </p:nvSpPr>
-        <p:spPr>
-          <a:xfrm>
-            <a:off x="731520" y="1508760"/>
-            <a:ext cx="4937760" cy="731520"/>
-          </a:xfrm>
-          <a:prstGeom prst="rect">
+        </p:nvCxnSpPr>
+        <p:spPr>
+          <a:xfrm>
+            <a:off x="914400" y="4937760"/>
+            <a:ext cx="6400800" cy="0"/>
+          </a:xfrm>
+          <a:prstGeom prst="line">
             <a:avLst/>
           </a:prstGeom>
-          <a:solidFill>
-            <a:srgbClr val="213E4B"/>
-          </a:solidFill>
           <a:ln w="19050">
             <a:solidFill>
               <a:srgbClr val="B4C7D2"/>
@@ -3160,78 +3157,51 @@
           </a:ln>
           <a:effectLst/>
         </p:spPr>
-        <p:txBody>
-          <a:bodyPr rtlCol="0" anchor="ctr"/>
-          <a:lstStyle/>
-          <a:p>
-            <a:pPr algn="ctr"/>
-          </a:p>
-        </p:txBody>
-      </p:sp>
+      </p:cxnSp>
       <p:cxnSp>
         <p:nvCxnSpPr>
-          <p:cNvPr id="4" name="C3-E26 arrow 2" descr="sci-ppt:o002"/>
+          <p:cNvPr id="4" name="C3-E26 line 2" descr="sci-ppt:o002"/>
           <p:cNvCxnSpPr/>
           <p:nvPr/>
         </p:nvCxnSpPr>
         <p:spPr>
           <a:xfrm>
-            <a:off x="1005840" y="1874519"/>
-            <a:ext cx="4297680" cy="0"/>
+            <a:off x="914400" y="1371600"/>
+            <a:ext cx="0" cy="3566160"/>
           </a:xfrm>
           <a:prstGeom prst="line">
             <a:avLst/>
           </a:prstGeom>
-          <a:ln w="25400">
+          <a:ln w="19050">
             <a:solidFill>
-              <a:srgbClr val="8EDBD4"/>
+              <a:srgbClr val="B4C7D2"/>
             </a:solidFill>
-            <a:headEnd type="none" w="med" len="med"/>
-            <a:tailEnd type="triangle" w="med" len="med"/>
           </a:ln>
           <a:effectLst/>
         </p:spPr>
       </p:cxnSp>
-      <p:sp>
-        <p:nvSpPr>
-          <p:cNvPr id="5" name="C3-E26 text 3" descr="sci-ppt:o003"/>
-          <p:cNvSpPr txBox="1"/>
+      <p:cxnSp>
+        <p:nvCxnSpPr>
+          <p:cNvPr id="5" name="C3-E26 line 3" descr="sci-ppt:o003"/>
+          <p:cNvCxnSpPr/>
           <p:nvPr/>
-        </p:nvSpPr>
-        <p:spPr>
-          <a:xfrm>
-            <a:off x="1463040" y="1051560"/>
-            <a:ext cx="3931920" cy="365760"/>
-          </a:xfrm>
-          <a:prstGeom prst="rect">
+        </p:nvCxnSpPr>
+        <p:spPr>
+          <a:xfrm>
+            <a:off x="914400" y="4937760"/>
+            <a:ext cx="0" cy="64008"/>
+          </a:xfrm>
+          <a:prstGeom prst="line">
             <a:avLst/>
           </a:prstGeom>
-          <a:noFill/>
+          <a:ln w="12700">
+            <a:solidFill>
+              <a:srgbClr val="B4C7D2"/>
+            </a:solidFill>
+          </a:ln>
           <a:effectLst/>
         </p:spPr>
-        <p:txBody>
-          <a:bodyPr wrap="square" lIns="27432" rIns="27432" tIns="18288" bIns="18288" anchor="ctr">
-            <a:spAutoFit/>
-          </a:bodyPr>
-          <a:lstStyle/>
-          <a:p>
-            <a:pPr algn="l">
-              <a:spcAft>
-                <a:spcPts val="0"/>
-              </a:spcAft>
-            </a:pPr>
-            <a:r>
-              <a:rPr sz="1800" b="0" i="0">
-                <a:solidFill>
-                  <a:srgbClr val="E7F0F3"/>
-                </a:solidFill>
-                <a:latin typeface="Arial"/>
-              </a:rPr>
-              <a:t>Finite emitted liquid: m_j, E_j, U_j</a:t>
-            </a:r>
-          </a:p>
-        </p:txBody>
-      </p:sp>
+      </p:cxnSp>
       <p:cxnSp>
         <p:nvCxnSpPr>
           <p:cNvPr id="6" name="C3-E26 line 4" descr="sci-ppt:o004"/>
@@ -3240,15 +3210,15 @@
         </p:nvCxnSpPr>
         <p:spPr>
           <a:xfrm>
-            <a:off x="731520" y="2606040"/>
-            <a:ext cx="4937760" cy="0"/>
+            <a:off x="914400" y="1371600"/>
+            <a:ext cx="0" cy="3566160"/>
           </a:xfrm>
           <a:prstGeom prst="line">
             <a:avLst/>
           </a:prstGeom>
-          <a:ln w="25400">
+          <a:ln w="7620">
             <a:solidFill>
-              <a:srgbClr val="8EDBD4"/>
+              <a:srgbClr val="2E4756"/>
             </a:solidFill>
           </a:ln>
           <a:effectLst/>
@@ -3262,8 +3232,8 @@
         </p:nvSpPr>
         <p:spPr>
           <a:xfrm>
-            <a:off x="2743200" y="2697480"/>
-            <a:ext cx="1828800" cy="365760"/>
+            <a:off x="457200" y="5020056"/>
+            <a:ext cx="914400" cy="208407"/>
           </a:xfrm>
           <a:prstGeom prst="rect">
             <a:avLst/>
@@ -3272,24 +3242,24 @@
           <a:effectLst/>
         </p:spPr>
         <p:txBody>
-          <a:bodyPr wrap="square" lIns="27432" rIns="27432" tIns="18288" bIns="18288" anchor="ctr">
+          <a:bodyPr wrap="none" lIns="18288" rIns="18288" tIns="18288" bIns="18288" anchor="t">
             <a:spAutoFit/>
           </a:bodyPr>
           <a:lstStyle/>
           <a:p>
-            <a:pPr algn="l">
+            <a:pPr algn="ctr">
               <a:spcAft>
                 <a:spcPts val="0"/>
               </a:spcAft>
             </a:pPr>
             <a:r>
-              <a:rPr sz="1700" b="0" i="0">
+              <a:rPr sz="1050" b="0" i="0">
                 <a:solidFill>
-                  <a:srgbClr val="E7F0F3"/>
+                  <a:srgbClr val="B4C7D2"/>
                 </a:solidFill>
                 <a:latin typeface="Arial"/>
               </a:rPr>
-              <a:t>L_j</a:t>
+              <a:t>0</a:t>
             </a:r>
           </a:p>
         </p:txBody>
@@ -3302,30 +3272,52 @@
         </p:nvCxnSpPr>
         <p:spPr>
           <a:xfrm>
-            <a:off x="457200" y="1508760"/>
-            <a:ext cx="0" cy="731520"/>
+            <a:off x="2514600" y="4937760"/>
+            <a:ext cx="0" cy="64008"/>
           </a:xfrm>
           <a:prstGeom prst="line">
             <a:avLst/>
           </a:prstGeom>
-          <a:ln w="25400">
+          <a:ln w="12700">
             <a:solidFill>
-              <a:srgbClr val="8EDBD4"/>
+              <a:srgbClr val="B4C7D2"/>
             </a:solidFill>
           </a:ln>
           <a:effectLst/>
         </p:spPr>
       </p:cxnSp>
-      <p:sp>
-        <p:nvSpPr>
-          <p:cNvPr id="9" name="C3-E26 text 7" descr="sci-ppt:o007"/>
+      <p:cxnSp>
+        <p:nvCxnSpPr>
+          <p:cNvPr id="9" name="C3-E26 line 7" descr="sci-ppt:o007"/>
+          <p:cNvCxnSpPr/>
+          <p:nvPr/>
+        </p:nvCxnSpPr>
+        <p:spPr>
+          <a:xfrm>
+            <a:off x="2514600" y="1371600"/>
+            <a:ext cx="0" cy="3566160"/>
+          </a:xfrm>
+          <a:prstGeom prst="line">
+            <a:avLst/>
+          </a:prstGeom>
+          <a:ln w="7620">
+            <a:solidFill>
+              <a:srgbClr val="2E4756"/>
+            </a:solidFill>
+          </a:ln>
+          <a:effectLst/>
+        </p:spPr>
+      </p:cxnSp>
+      <p:sp>
+        <p:nvSpPr>
+          <p:cNvPr id="10" name="C3-E26 text 8" descr="sci-ppt:o008"/>
           <p:cNvSpPr txBox="1"/>
           <p:nvPr/>
         </p:nvSpPr>
         <p:spPr>
           <a:xfrm>
-            <a:off x="137160" y="2377440"/>
-            <a:ext cx="1645920" cy="320040"/>
+            <a:off x="2057400" y="5020056"/>
+            <a:ext cx="914400" cy="208407"/>
           </a:xfrm>
           <a:prstGeom prst="rect">
             <a:avLst/>
@@ -3334,212 +3326,134 @@
           <a:effectLst/>
         </p:spPr>
         <p:txBody>
-          <a:bodyPr wrap="square" lIns="27432" rIns="27432" tIns="18288" bIns="18288" anchor="ctr">
+          <a:bodyPr wrap="none" lIns="18288" rIns="18288" tIns="18288" bIns="18288" anchor="t">
             <a:spAutoFit/>
           </a:bodyPr>
           <a:lstStyle/>
           <a:p>
-            <a:pPr algn="l">
+            <a:pPr algn="ctr">
               <a:spcAft>
                 <a:spcPts val="0"/>
               </a:spcAft>
             </a:pPr>
             <a:r>
-              <a:rPr sz="1400" b="0" i="0">
+              <a:rPr sz="1050" b="0" i="0">
                 <a:solidFill>
-                  <a:srgbClr val="E7F0F3"/>
+                  <a:srgbClr val="B4C7D2"/>
                 </a:solidFill>
                 <a:latin typeface="Arial"/>
               </a:rPr>
-              <a:t>d_j = 2a_j</a:t>
-            </a:r>
-          </a:p>
-        </p:txBody>
-      </p:sp>
-      <p:sp>
-        <p:nvSpPr>
-          <p:cNvPr id="10" name="C3-E26 rect 8" descr="sci-ppt:o008"/>
-          <p:cNvSpPr/>
+              <a:t>40</a:t>
+            </a:r>
+          </a:p>
+        </p:txBody>
+      </p:sp>
+      <p:cxnSp>
+        <p:nvCxnSpPr>
+          <p:cNvPr id="11" name="C3-E26 line 9" descr="sci-ppt:o009"/>
+          <p:cNvCxnSpPr/>
           <p:nvPr/>
-        </p:nvSpPr>
-        <p:spPr>
-          <a:xfrm>
-            <a:off x="8366760" y="914400"/>
-            <a:ext cx="320040" cy="1737360"/>
-          </a:xfrm>
-          <a:prstGeom prst="rect">
+        </p:nvCxnSpPr>
+        <p:spPr>
+          <a:xfrm>
+            <a:off x="4114800" y="4937760"/>
+            <a:ext cx="0" cy="64008"/>
+          </a:xfrm>
+          <a:prstGeom prst="line">
             <a:avLst/>
           </a:prstGeom>
-          <a:solidFill>
-            <a:srgbClr val="213E4B"/>
-          </a:solidFill>
-          <a:ln w="19050">
+          <a:ln w="12700">
             <a:solidFill>
               <a:srgbClr val="B4C7D2"/>
             </a:solidFill>
           </a:ln>
           <a:effectLst/>
         </p:spPr>
-        <p:txBody>
-          <a:bodyPr rtlCol="0" anchor="ctr"/>
-          <a:lstStyle/>
-          <a:p>
-            <a:pPr algn="ctr"/>
-          </a:p>
-        </p:txBody>
-      </p:sp>
-      <p:sp>
-        <p:nvSpPr>
-          <p:cNvPr id="11" name="C3-E26 rect 9" descr="sci-ppt:o009"/>
-          <p:cNvSpPr/>
+      </p:cxnSp>
+      <p:cxnSp>
+        <p:nvCxnSpPr>
+          <p:cNvPr id="12" name="C3-E26 line 10" descr="sci-ppt:o010"/>
+          <p:cNvCxnSpPr/>
           <p:nvPr/>
-        </p:nvSpPr>
-        <p:spPr>
-          <a:xfrm>
-            <a:off x="8321040" y="1600200"/>
-            <a:ext cx="411480" cy="640080"/>
+        </p:nvCxnSpPr>
+        <p:spPr>
+          <a:xfrm>
+            <a:off x="4114800" y="1371600"/>
+            <a:ext cx="0" cy="3566160"/>
+          </a:xfrm>
+          <a:prstGeom prst="line">
+            <a:avLst/>
+          </a:prstGeom>
+          <a:ln w="7620">
+            <a:solidFill>
+              <a:srgbClr val="2E4756"/>
+            </a:solidFill>
+          </a:ln>
+          <a:effectLst/>
+        </p:spPr>
+      </p:cxnSp>
+      <p:sp>
+        <p:nvSpPr>
+          <p:cNvPr id="13" name="C3-E26 text 11" descr="sci-ppt:o011"/>
+          <p:cNvSpPr txBox="1"/>
+          <p:nvPr/>
+        </p:nvSpPr>
+        <p:spPr>
+          <a:xfrm>
+            <a:off x="3657600" y="5020056"/>
+            <a:ext cx="914400" cy="208407"/>
           </a:xfrm>
           <a:prstGeom prst="rect">
             <a:avLst/>
           </a:prstGeom>
-          <a:solidFill>
-            <a:srgbClr val="8EDBD4"/>
-          </a:solidFill>
-          <a:ln w="19050">
+          <a:noFill/>
+          <a:effectLst/>
+        </p:spPr>
+        <p:txBody>
+          <a:bodyPr wrap="none" lIns="18288" rIns="18288" tIns="18288" bIns="18288" anchor="t">
+            <a:spAutoFit/>
+          </a:bodyPr>
+          <a:lstStyle/>
+          <a:p>
+            <a:pPr algn="ctr">
+              <a:spcAft>
+                <a:spcPts val="0"/>
+              </a:spcAft>
+            </a:pPr>
+            <a:r>
+              <a:rPr sz="1050" b="0" i="0">
+                <a:solidFill>
+                  <a:srgbClr val="B4C7D2"/>
+                </a:solidFill>
+                <a:latin typeface="Arial"/>
+              </a:rPr>
+              <a:t>80</a:t>
+            </a:r>
+          </a:p>
+        </p:txBody>
+      </p:sp>
+      <p:cxnSp>
+        <p:nvCxnSpPr>
+          <p:cNvPr id="14" name="C3-E26 line 12" descr="sci-ppt:o012"/>
+          <p:cNvCxnSpPr/>
+          <p:nvPr/>
+        </p:nvCxnSpPr>
+        <p:spPr>
+          <a:xfrm>
+            <a:off x="5715000" y="4937760"/>
+            <a:ext cx="0" cy="64008"/>
+          </a:xfrm>
+          <a:prstGeom prst="line">
+            <a:avLst/>
+          </a:prstGeom>
+          <a:ln w="12700">
             <a:solidFill>
               <a:srgbClr val="B4C7D2"/>
             </a:solidFill>
           </a:ln>
           <a:effectLst/>
         </p:spPr>
-        <p:txBody>
-          <a:bodyPr rtlCol="0" anchor="ctr"/>
-          <a:lstStyle/>
-          <a:p>
-            <a:pPr algn="ctr"/>
-          </a:p>
-        </p:txBody>
-      </p:sp>
-      <p:cxnSp>
-        <p:nvCxnSpPr>
-          <p:cNvPr id="12" name="C3-E26 arrow 10" descr="sci-ppt:o010"/>
-          <p:cNvCxnSpPr/>
-          <p:nvPr/>
-        </p:nvCxnSpPr>
-        <p:spPr>
-          <a:xfrm>
-            <a:off x="5760720" y="1874519"/>
-            <a:ext cx="2560320" cy="0"/>
-          </a:xfrm>
-          <a:prstGeom prst="line">
-            <a:avLst/>
-          </a:prstGeom>
-          <a:ln w="25400">
-            <a:solidFill>
-              <a:srgbClr val="8EDBD4"/>
-            </a:solidFill>
-            <a:headEnd type="none" w="med" len="med"/>
-            <a:tailEnd type="triangle" w="med" len="med"/>
-          </a:ln>
-          <a:effectLst/>
-        </p:spPr>
       </p:cxnSp>
-      <p:sp>
-        <p:nvSpPr>
-          <p:cNvPr id="13" name="C3-E26 text 11" descr="sci-ppt:o011"/>
-          <p:cNvSpPr txBox="1"/>
-          <p:nvPr/>
-        </p:nvSpPr>
-        <p:spPr>
-          <a:xfrm>
-            <a:off x="8961120" y="1554480"/>
-            <a:ext cx="2651760" cy="731520"/>
-          </a:xfrm>
-          <a:prstGeom prst="rect">
-            <a:avLst/>
-          </a:prstGeom>
-          <a:noFill/>
-          <a:effectLst/>
-        </p:spPr>
-        <p:txBody>
-          <a:bodyPr wrap="square" lIns="27432" rIns="27432" tIns="18288" bIns="18288" anchor="ctr">
-            <a:spAutoFit/>
-          </a:bodyPr>
-          <a:lstStyle/>
-          <a:p>
-            <a:pPr algn="l">
-              <a:spcAft>
-                <a:spcPts val="0"/>
-              </a:spcAft>
-            </a:pPr>
-            <a:r>
-              <a:rPr sz="1700" b="0" i="0">
-                <a:solidFill>
-                  <a:srgbClr val="E7F0F3"/>
-                </a:solidFill>
-                <a:latin typeface="Arial"/>
-              </a:rPr>
-              <a:t>Fixed footprint A_o</a:t>
-            </a:r>
-          </a:p>
-          <a:p>
-            <a:pPr algn="l">
-              <a:spcAft>
-                <a:spcPts val="0"/>
-              </a:spcAft>
-            </a:pPr>
-            <a:r>
-              <a:rPr sz="1700" b="0" i="0">
-                <a:solidFill>
-                  <a:srgbClr val="E7F0F3"/>
-                </a:solidFill>
-                <a:latin typeface="Arial"/>
-              </a:rPr>
-              <a:t>Fixed window τ_o</a:t>
-            </a:r>
-          </a:p>
-        </p:txBody>
-      </p:sp>
-      <p:sp>
-        <p:nvSpPr>
-          <p:cNvPr id="14" name="C3-E26 text 12" descr="sci-ppt:o012"/>
-          <p:cNvSpPr txBox="1"/>
-          <p:nvPr/>
-        </p:nvSpPr>
-        <p:spPr>
-          <a:xfrm>
-            <a:off x="6217920" y="2971800"/>
-            <a:ext cx="5303520" cy="457200"/>
-          </a:xfrm>
-          <a:prstGeom prst="rect">
-            <a:avLst/>
-          </a:prstGeom>
-          <a:noFill/>
-          <a:effectLst/>
-        </p:spPr>
-        <p:txBody>
-          <a:bodyPr wrap="square" lIns="27432" rIns="27432" tIns="18288" bIns="18288" anchor="ctr">
-            <a:spAutoFit/>
-          </a:bodyPr>
-          <a:lstStyle/>
-          <a:p>
-            <a:pPr algn="l">
-              <a:spcAft>
-                <a:spcPts val="0"/>
-              </a:spcAft>
-            </a:pPr>
-            <a:r>
-              <a:rPr sz="1700" b="0" i="0">
-                <a:solidFill>
-                  <a:srgbClr val="8EDBD4"/>
-                </a:solidFill>
-                <a:latin typeface="Arial"/>
-              </a:rPr>
-              <a:t>p_obs: area and time average</a:t>
-            </a:r>
-          </a:p>
-        </p:txBody>
-      </p:sp>
       <p:cxnSp>
         <p:nvCxnSpPr>
           <p:cNvPr id="15" name="C3-E26 line 13" descr="sci-ppt:o013"/>
@@ -3548,30 +3462,114 @@
         </p:nvCxnSpPr>
         <p:spPr>
           <a:xfrm>
-            <a:off x="274320" y="3977639"/>
-            <a:ext cx="11612880" cy="0"/>
+            <a:off x="5715000" y="1371600"/>
+            <a:ext cx="0" cy="3566160"/>
+          </a:xfrm>
+          <a:prstGeom prst="line">
+            <a:avLst/>
+          </a:prstGeom>
+          <a:ln w="7620">
+            <a:solidFill>
+              <a:srgbClr val="2E4756"/>
+            </a:solidFill>
+          </a:ln>
+          <a:effectLst/>
+        </p:spPr>
+      </p:cxnSp>
+      <p:sp>
+        <p:nvSpPr>
+          <p:cNvPr id="16" name="C3-E26 text 14" descr="sci-ppt:o014"/>
+          <p:cNvSpPr txBox="1"/>
+          <p:nvPr/>
+        </p:nvSpPr>
+        <p:spPr>
+          <a:xfrm>
+            <a:off x="5257800" y="5020056"/>
+            <a:ext cx="914400" cy="208407"/>
+          </a:xfrm>
+          <a:prstGeom prst="rect">
+            <a:avLst/>
+          </a:prstGeom>
+          <a:noFill/>
+          <a:effectLst/>
+        </p:spPr>
+        <p:txBody>
+          <a:bodyPr wrap="none" lIns="18288" rIns="18288" tIns="18288" bIns="18288" anchor="t">
+            <a:spAutoFit/>
+          </a:bodyPr>
+          <a:lstStyle/>
+          <a:p>
+            <a:pPr algn="ctr">
+              <a:spcAft>
+                <a:spcPts val="0"/>
+              </a:spcAft>
+            </a:pPr>
+            <a:r>
+              <a:rPr sz="1050" b="0" i="0">
+                <a:solidFill>
+                  <a:srgbClr val="B4C7D2"/>
+                </a:solidFill>
+                <a:latin typeface="Arial"/>
+              </a:rPr>
+              <a:t>120</a:t>
+            </a:r>
+          </a:p>
+        </p:txBody>
+      </p:sp>
+      <p:cxnSp>
+        <p:nvCxnSpPr>
+          <p:cNvPr id="17" name="C3-E26 line 15" descr="sci-ppt:o015"/>
+          <p:cNvCxnSpPr/>
+          <p:nvPr/>
+        </p:nvCxnSpPr>
+        <p:spPr>
+          <a:xfrm>
+            <a:off x="7315200" y="4937760"/>
+            <a:ext cx="0" cy="64008"/>
           </a:xfrm>
           <a:prstGeom prst="line">
             <a:avLst/>
           </a:prstGeom>
           <a:ln w="12700">
             <a:solidFill>
-              <a:srgbClr val="405967"/>
+              <a:srgbClr val="B4C7D2"/>
             </a:solidFill>
           </a:ln>
           <a:effectLst/>
         </p:spPr>
       </p:cxnSp>
-      <p:sp>
-        <p:nvSpPr>
-          <p:cNvPr id="16" name="C3-E26 text 14" descr="sci-ppt:o014"/>
+      <p:cxnSp>
+        <p:nvCxnSpPr>
+          <p:cNvPr id="18" name="C3-E26 line 16" descr="sci-ppt:o016"/>
+          <p:cNvCxnSpPr/>
+          <p:nvPr/>
+        </p:nvCxnSpPr>
+        <p:spPr>
+          <a:xfrm>
+            <a:off x="7315200" y="1371600"/>
+            <a:ext cx="0" cy="3566160"/>
+          </a:xfrm>
+          <a:prstGeom prst="line">
+            <a:avLst/>
+          </a:prstGeom>
+          <a:ln w="7620">
+            <a:solidFill>
+              <a:srgbClr val="2E4756"/>
+            </a:solidFill>
+          </a:ln>
+          <a:effectLst/>
+        </p:spPr>
+      </p:cxnSp>
+      <p:sp>
+        <p:nvSpPr>
+          <p:cNvPr id="19" name="C3-E26 text 17" descr="sci-ppt:o017"/>
           <p:cNvSpPr txBox="1"/>
           <p:nvPr/>
         </p:nvSpPr>
         <p:spPr>
           <a:xfrm>
-            <a:off x="320040" y="4096512"/>
-            <a:ext cx="5715000" cy="246888"/>
+            <a:off x="6858000" y="5020056"/>
+            <a:ext cx="914400" cy="208407"/>
           </a:xfrm>
           <a:prstGeom prst="rect">
             <a:avLst/>
@@ -3580,7 +3578,1896 @@
           <a:effectLst/>
         </p:spPr>
         <p:txBody>
-          <a:bodyPr wrap="square" lIns="27432" rIns="27432" tIns="18288" bIns="18288" anchor="ctr">
+          <a:bodyPr wrap="none" lIns="18288" rIns="18288" tIns="18288" bIns="18288" anchor="t">
+            <a:spAutoFit/>
+          </a:bodyPr>
+          <a:lstStyle/>
+          <a:p>
+            <a:pPr algn="ctr">
+              <a:spcAft>
+                <a:spcPts val="0"/>
+              </a:spcAft>
+            </a:pPr>
+            <a:r>
+              <a:rPr sz="1050" b="0" i="0">
+                <a:solidFill>
+                  <a:srgbClr val="B4C7D2"/>
+                </a:solidFill>
+                <a:latin typeface="Arial"/>
+              </a:rPr>
+              <a:t>160</a:t>
+            </a:r>
+          </a:p>
+        </p:txBody>
+      </p:sp>
+      <p:cxnSp>
+        <p:nvCxnSpPr>
+          <p:cNvPr id="20" name="C3-E26 line 18" descr="sci-ppt:o018"/>
+          <p:cNvCxnSpPr/>
+          <p:nvPr/>
+        </p:nvCxnSpPr>
+        <p:spPr>
+          <a:xfrm>
+            <a:off x="850392" y="4937760"/>
+            <a:ext cx="64008" cy="0"/>
+          </a:xfrm>
+          <a:prstGeom prst="line">
+            <a:avLst/>
+          </a:prstGeom>
+          <a:ln w="12700">
+            <a:solidFill>
+              <a:srgbClr val="B4C7D2"/>
+            </a:solidFill>
+          </a:ln>
+          <a:effectLst/>
+        </p:spPr>
+      </p:cxnSp>
+      <p:cxnSp>
+        <p:nvCxnSpPr>
+          <p:cNvPr id="21" name="C3-E26 line 19" descr="sci-ppt:o019"/>
+          <p:cNvCxnSpPr/>
+          <p:nvPr/>
+        </p:nvCxnSpPr>
+        <p:spPr>
+          <a:xfrm>
+            <a:off x="850392" y="3387255"/>
+            <a:ext cx="64008" cy="0"/>
+          </a:xfrm>
+          <a:prstGeom prst="line">
+            <a:avLst/>
+          </a:prstGeom>
+          <a:ln w="12700">
+            <a:solidFill>
+              <a:srgbClr val="B4C7D2"/>
+            </a:solidFill>
+          </a:ln>
+          <a:effectLst/>
+        </p:spPr>
+      </p:cxnSp>
+      <p:cxnSp>
+        <p:nvCxnSpPr>
+          <p:cNvPr id="22" name="C3-E26 line 20" descr="sci-ppt:o020"/>
+          <p:cNvCxnSpPr/>
+          <p:nvPr/>
+        </p:nvCxnSpPr>
+        <p:spPr>
+          <a:xfrm>
+            <a:off x="914400" y="3387255"/>
+            <a:ext cx="6400800" cy="0"/>
+          </a:xfrm>
+          <a:prstGeom prst="line">
+            <a:avLst/>
+          </a:prstGeom>
+          <a:ln w="7620">
+            <a:solidFill>
+              <a:srgbClr val="2E4756"/>
+            </a:solidFill>
+          </a:ln>
+          <a:effectLst/>
+        </p:spPr>
+      </p:cxnSp>
+      <p:sp>
+        <p:nvSpPr>
+          <p:cNvPr id="23" name="C3-E26 text 21" descr="sci-ppt:o021"/>
+          <p:cNvSpPr txBox="1"/>
+          <p:nvPr/>
+        </p:nvSpPr>
+        <p:spPr>
+          <a:xfrm>
+            <a:off x="45720" y="3304959"/>
+            <a:ext cx="777240" cy="208407"/>
+          </a:xfrm>
+          <a:prstGeom prst="rect">
+            <a:avLst/>
+          </a:prstGeom>
+          <a:noFill/>
+          <a:effectLst/>
+        </p:spPr>
+        <p:txBody>
+          <a:bodyPr wrap="none" lIns="18288" rIns="18288" tIns="18288" bIns="18288" anchor="t">
+            <a:spAutoFit/>
+          </a:bodyPr>
+          <a:lstStyle/>
+          <a:p>
+            <a:pPr algn="r">
+              <a:spcAft>
+                <a:spcPts val="0"/>
+              </a:spcAft>
+            </a:pPr>
+            <a:r>
+              <a:rPr sz="1050" b="0" i="0">
+                <a:solidFill>
+                  <a:srgbClr val="B4C7D2"/>
+                </a:solidFill>
+                <a:latin typeface="Arial"/>
+              </a:rPr>
+              <a:t>0.5</a:t>
+            </a:r>
+          </a:p>
+        </p:txBody>
+      </p:sp>
+      <p:cxnSp>
+        <p:nvCxnSpPr>
+          <p:cNvPr id="24" name="C3-E26 line 22" descr="sci-ppt:o022"/>
+          <p:cNvCxnSpPr/>
+          <p:nvPr/>
+        </p:nvCxnSpPr>
+        <p:spPr>
+          <a:xfrm>
+            <a:off x="850392" y="1836751"/>
+            <a:ext cx="64008" cy="0"/>
+          </a:xfrm>
+          <a:prstGeom prst="line">
+            <a:avLst/>
+          </a:prstGeom>
+          <a:ln w="12700">
+            <a:solidFill>
+              <a:srgbClr val="B4C7D2"/>
+            </a:solidFill>
+          </a:ln>
+          <a:effectLst/>
+        </p:spPr>
+      </p:cxnSp>
+      <p:cxnSp>
+        <p:nvCxnSpPr>
+          <p:cNvPr id="25" name="C3-E26 line 23" descr="sci-ppt:o023"/>
+          <p:cNvCxnSpPr/>
+          <p:nvPr/>
+        </p:nvCxnSpPr>
+        <p:spPr>
+          <a:xfrm>
+            <a:off x="914400" y="1836751"/>
+            <a:ext cx="6400800" cy="0"/>
+          </a:xfrm>
+          <a:prstGeom prst="line">
+            <a:avLst/>
+          </a:prstGeom>
+          <a:ln w="7620">
+            <a:solidFill>
+              <a:srgbClr val="2E4756"/>
+            </a:solidFill>
+          </a:ln>
+          <a:effectLst/>
+        </p:spPr>
+      </p:cxnSp>
+      <p:sp>
+        <p:nvSpPr>
+          <p:cNvPr id="26" name="C3-E26 text 24" descr="sci-ppt:o024"/>
+          <p:cNvSpPr txBox="1"/>
+          <p:nvPr/>
+        </p:nvSpPr>
+        <p:spPr>
+          <a:xfrm>
+            <a:off x="45720" y="1754455"/>
+            <a:ext cx="777240" cy="208407"/>
+          </a:xfrm>
+          <a:prstGeom prst="rect">
+            <a:avLst/>
+          </a:prstGeom>
+          <a:noFill/>
+          <a:effectLst/>
+        </p:spPr>
+        <p:txBody>
+          <a:bodyPr wrap="none" lIns="18288" rIns="18288" tIns="18288" bIns="18288" anchor="t">
+            <a:spAutoFit/>
+          </a:bodyPr>
+          <a:lstStyle/>
+          <a:p>
+            <a:pPr algn="r">
+              <a:spcAft>
+                <a:spcPts val="0"/>
+              </a:spcAft>
+            </a:pPr>
+            <a:r>
+              <a:rPr sz="1050" b="0" i="0">
+                <a:solidFill>
+                  <a:srgbClr val="B4C7D2"/>
+                </a:solidFill>
+                <a:latin typeface="Arial"/>
+              </a:rPr>
+              <a:t>1.0</a:t>
+            </a:r>
+          </a:p>
+        </p:txBody>
+      </p:sp>
+      <p:sp>
+        <p:nvSpPr>
+          <p:cNvPr id="27" name="C3-E26 text 25" descr="sci-ppt:o025"/>
+          <p:cNvSpPr txBox="1"/>
+          <p:nvPr/>
+        </p:nvSpPr>
+        <p:spPr>
+          <a:xfrm>
+            <a:off x="914400" y="5221224"/>
+            <a:ext cx="6400800" cy="231648"/>
+          </a:xfrm>
+          <a:prstGeom prst="rect">
+            <a:avLst/>
+          </a:prstGeom>
+          <a:noFill/>
+          <a:effectLst/>
+        </p:spPr>
+        <p:txBody>
+          <a:bodyPr wrap="none" lIns="18288" rIns="18288" tIns="18288" bIns="18288" anchor="t">
+            <a:spAutoFit/>
+          </a:bodyPr>
+          <a:lstStyle/>
+          <a:p>
+            <a:pPr algn="ctr">
+              <a:spcAft>
+                <a:spcPts val="0"/>
+              </a:spcAft>
+            </a:pPr>
+            <a:r>
+              <a:rPr sz="1200" b="0" i="0">
+                <a:solidFill>
+                  <a:srgbClr val="E7F0F3"/>
+                </a:solidFill>
+                <a:latin typeface="Arial"/>
+              </a:rPr>
+              <a:t>time t  (ns)</a:t>
+            </a:r>
+          </a:p>
+        </p:txBody>
+      </p:sp>
+      <p:sp>
+        <p:nvSpPr>
+          <p:cNvPr id="28" name="C3-E26 text 26" descr="sci-ppt:o026"/>
+          <p:cNvSpPr txBox="1"/>
+          <p:nvPr/>
+        </p:nvSpPr>
+        <p:spPr>
+          <a:xfrm>
+            <a:off x="365760" y="1024128"/>
+            <a:ext cx="6400800" cy="231648"/>
+          </a:xfrm>
+          <a:prstGeom prst="rect">
+            <a:avLst/>
+          </a:prstGeom>
+          <a:noFill/>
+          <a:effectLst/>
+        </p:spPr>
+        <p:txBody>
+          <a:bodyPr wrap="none" lIns="18288" rIns="18288" tIns="18288" bIns="18288" anchor="t">
+            <a:spAutoFit/>
+          </a:bodyPr>
+          <a:lstStyle/>
+          <a:p>
+            <a:pPr algn="l">
+              <a:spcAft>
+                <a:spcPts val="0"/>
+              </a:spcAft>
+            </a:pPr>
+            <a:r>
+              <a:rPr sz="1200" b="0" i="0">
+                <a:solidFill>
+                  <a:srgbClr val="E7F0F3"/>
+                </a:solidFill>
+                <a:latin typeface="Arial"/>
+              </a:rPr>
+              <a:t>p_obs / (ρ c Uⱼ)</a:t>
+            </a:r>
+          </a:p>
+        </p:txBody>
+      </p:sp>
+      <p:sp>
+        <p:nvSpPr>
+          <p:cNvPr id="29" name="C3-E26 polygon 27" descr="sci-ppt:o027"/>
+          <p:cNvSpPr/>
+          <p:nvPr/>
+        </p:nvSpPr>
+        <p:spPr>
+          <a:xfrm>
+            <a:off x="914400" y="1836751"/>
+            <a:ext cx="6387991" cy="3101009"/>
+          </a:xfrm>
+          <a:custGeom>
+            <a:avLst/>
+            <a:gdLst/>
+            <a:ahLst/>
+            <a:cxnLst/>
+            <a:rect l="l" t="t" r="r" b="b"/>
+            <a:pathLst>
+              <a:path w="6387991" h="3101009">
+                <a:moveTo>
+                  <a:pt x="0" y="0"/>
+                </a:moveTo>
+                <a:lnTo>
+                  <a:pt x="56035" y="0"/>
+                </a:lnTo>
+                <a:lnTo>
+                  <a:pt x="112070" y="0"/>
+                </a:lnTo>
+                <a:lnTo>
+                  <a:pt x="168105" y="0"/>
+                </a:lnTo>
+                <a:lnTo>
+                  <a:pt x="224140" y="0"/>
+                </a:lnTo>
+                <a:lnTo>
+                  <a:pt x="280175" y="0"/>
+                </a:lnTo>
+                <a:lnTo>
+                  <a:pt x="336210" y="0"/>
+                </a:lnTo>
+                <a:lnTo>
+                  <a:pt x="392245" y="0"/>
+                </a:lnTo>
+                <a:lnTo>
+                  <a:pt x="448280" y="0"/>
+                </a:lnTo>
+                <a:lnTo>
+                  <a:pt x="504315" y="0"/>
+                </a:lnTo>
+                <a:lnTo>
+                  <a:pt x="560350" y="0"/>
+                </a:lnTo>
+                <a:lnTo>
+                  <a:pt x="616385" y="0"/>
+                </a:lnTo>
+                <a:lnTo>
+                  <a:pt x="672420" y="0"/>
+                </a:lnTo>
+                <a:lnTo>
+                  <a:pt x="728455" y="0"/>
+                </a:lnTo>
+                <a:lnTo>
+                  <a:pt x="784490" y="0"/>
+                </a:lnTo>
+                <a:lnTo>
+                  <a:pt x="840525" y="0"/>
+                </a:lnTo>
+                <a:lnTo>
+                  <a:pt x="896560" y="0"/>
+                </a:lnTo>
+                <a:lnTo>
+                  <a:pt x="952595" y="0"/>
+                </a:lnTo>
+                <a:lnTo>
+                  <a:pt x="1008630" y="0"/>
+                </a:lnTo>
+                <a:lnTo>
+                  <a:pt x="1064665" y="0"/>
+                </a:lnTo>
+                <a:lnTo>
+                  <a:pt x="1120700" y="0"/>
+                </a:lnTo>
+                <a:lnTo>
+                  <a:pt x="1176735" y="0"/>
+                </a:lnTo>
+                <a:lnTo>
+                  <a:pt x="1232770" y="0"/>
+                </a:lnTo>
+                <a:lnTo>
+                  <a:pt x="1288805" y="0"/>
+                </a:lnTo>
+                <a:lnTo>
+                  <a:pt x="1344840" y="0"/>
+                </a:lnTo>
+                <a:lnTo>
+                  <a:pt x="1400875" y="3101009"/>
+                </a:lnTo>
+                <a:lnTo>
+                  <a:pt x="1456910" y="3101009"/>
+                </a:lnTo>
+                <a:lnTo>
+                  <a:pt x="1512945" y="3101009"/>
+                </a:lnTo>
+                <a:lnTo>
+                  <a:pt x="1568980" y="3101009"/>
+                </a:lnTo>
+                <a:lnTo>
+                  <a:pt x="1625015" y="3101009"/>
+                </a:lnTo>
+                <a:lnTo>
+                  <a:pt x="1681050" y="3101009"/>
+                </a:lnTo>
+                <a:lnTo>
+                  <a:pt x="1737085" y="3101009"/>
+                </a:lnTo>
+                <a:lnTo>
+                  <a:pt x="1793120" y="3101009"/>
+                </a:lnTo>
+                <a:lnTo>
+                  <a:pt x="1849155" y="3101009"/>
+                </a:lnTo>
+                <a:lnTo>
+                  <a:pt x="1905190" y="3101009"/>
+                </a:lnTo>
+                <a:lnTo>
+                  <a:pt x="1961225" y="3101009"/>
+                </a:lnTo>
+                <a:lnTo>
+                  <a:pt x="2017260" y="3101009"/>
+                </a:lnTo>
+                <a:lnTo>
+                  <a:pt x="2073295" y="3101009"/>
+                </a:lnTo>
+                <a:lnTo>
+                  <a:pt x="2129330" y="3101009"/>
+                </a:lnTo>
+                <a:lnTo>
+                  <a:pt x="2185365" y="3101009"/>
+                </a:lnTo>
+                <a:lnTo>
+                  <a:pt x="2241400" y="3101009"/>
+                </a:lnTo>
+                <a:lnTo>
+                  <a:pt x="2297435" y="3101009"/>
+                </a:lnTo>
+                <a:lnTo>
+                  <a:pt x="2353470" y="3101009"/>
+                </a:lnTo>
+                <a:lnTo>
+                  <a:pt x="2409505" y="3101009"/>
+                </a:lnTo>
+                <a:lnTo>
+                  <a:pt x="2465540" y="3101009"/>
+                </a:lnTo>
+                <a:lnTo>
+                  <a:pt x="2521575" y="3101009"/>
+                </a:lnTo>
+                <a:lnTo>
+                  <a:pt x="2577610" y="3101009"/>
+                </a:lnTo>
+                <a:lnTo>
+                  <a:pt x="2633645" y="3101009"/>
+                </a:lnTo>
+                <a:lnTo>
+                  <a:pt x="2689680" y="3101009"/>
+                </a:lnTo>
+                <a:lnTo>
+                  <a:pt x="2745715" y="3101009"/>
+                </a:lnTo>
+                <a:lnTo>
+                  <a:pt x="2801750" y="3101009"/>
+                </a:lnTo>
+                <a:lnTo>
+                  <a:pt x="2857785" y="3101009"/>
+                </a:lnTo>
+                <a:lnTo>
+                  <a:pt x="2913820" y="3101009"/>
+                </a:lnTo>
+                <a:lnTo>
+                  <a:pt x="2969855" y="3101009"/>
+                </a:lnTo>
+                <a:lnTo>
+                  <a:pt x="3025890" y="3101009"/>
+                </a:lnTo>
+                <a:lnTo>
+                  <a:pt x="3081925" y="3101009"/>
+                </a:lnTo>
+                <a:lnTo>
+                  <a:pt x="3137960" y="3101009"/>
+                </a:lnTo>
+                <a:lnTo>
+                  <a:pt x="3193995" y="3101009"/>
+                </a:lnTo>
+                <a:lnTo>
+                  <a:pt x="3250031" y="3101009"/>
+                </a:lnTo>
+                <a:lnTo>
+                  <a:pt x="3306066" y="3101009"/>
+                </a:lnTo>
+                <a:lnTo>
+                  <a:pt x="3362101" y="3101009"/>
+                </a:lnTo>
+                <a:lnTo>
+                  <a:pt x="3418136" y="3101009"/>
+                </a:lnTo>
+                <a:lnTo>
+                  <a:pt x="3474171" y="3101009"/>
+                </a:lnTo>
+                <a:lnTo>
+                  <a:pt x="3530206" y="3101009"/>
+                </a:lnTo>
+                <a:lnTo>
+                  <a:pt x="3586241" y="3101009"/>
+                </a:lnTo>
+                <a:lnTo>
+                  <a:pt x="3642276" y="3101009"/>
+                </a:lnTo>
+                <a:lnTo>
+                  <a:pt x="3698311" y="3101009"/>
+                </a:lnTo>
+                <a:lnTo>
+                  <a:pt x="3754346" y="3101009"/>
+                </a:lnTo>
+                <a:lnTo>
+                  <a:pt x="3810381" y="3101009"/>
+                </a:lnTo>
+                <a:lnTo>
+                  <a:pt x="3866416" y="3101009"/>
+                </a:lnTo>
+                <a:lnTo>
+                  <a:pt x="3922451" y="3101009"/>
+                </a:lnTo>
+                <a:lnTo>
+                  <a:pt x="3978486" y="3101009"/>
+                </a:lnTo>
+                <a:lnTo>
+                  <a:pt x="4034521" y="3101009"/>
+                </a:lnTo>
+                <a:lnTo>
+                  <a:pt x="4090556" y="3101009"/>
+                </a:lnTo>
+                <a:lnTo>
+                  <a:pt x="4146591" y="3101009"/>
+                </a:lnTo>
+                <a:lnTo>
+                  <a:pt x="4202626" y="3101009"/>
+                </a:lnTo>
+                <a:lnTo>
+                  <a:pt x="4258661" y="3101009"/>
+                </a:lnTo>
+                <a:lnTo>
+                  <a:pt x="4314696" y="3101009"/>
+                </a:lnTo>
+                <a:lnTo>
+                  <a:pt x="4370731" y="3101009"/>
+                </a:lnTo>
+                <a:lnTo>
+                  <a:pt x="4426766" y="3101009"/>
+                </a:lnTo>
+                <a:lnTo>
+                  <a:pt x="4482801" y="3101009"/>
+                </a:lnTo>
+                <a:lnTo>
+                  <a:pt x="4538836" y="3101009"/>
+                </a:lnTo>
+                <a:lnTo>
+                  <a:pt x="4594871" y="3101009"/>
+                </a:lnTo>
+                <a:lnTo>
+                  <a:pt x="4650906" y="3101009"/>
+                </a:lnTo>
+                <a:lnTo>
+                  <a:pt x="4706941" y="3101009"/>
+                </a:lnTo>
+                <a:lnTo>
+                  <a:pt x="4762976" y="3101009"/>
+                </a:lnTo>
+                <a:lnTo>
+                  <a:pt x="4819011" y="3101009"/>
+                </a:lnTo>
+                <a:lnTo>
+                  <a:pt x="4875046" y="3101009"/>
+                </a:lnTo>
+                <a:lnTo>
+                  <a:pt x="4931081" y="3101009"/>
+                </a:lnTo>
+                <a:lnTo>
+                  <a:pt x="4987116" y="3101009"/>
+                </a:lnTo>
+                <a:lnTo>
+                  <a:pt x="5043151" y="3101009"/>
+                </a:lnTo>
+                <a:lnTo>
+                  <a:pt x="5099186" y="3101009"/>
+                </a:lnTo>
+                <a:lnTo>
+                  <a:pt x="5155221" y="3101009"/>
+                </a:lnTo>
+                <a:lnTo>
+                  <a:pt x="5211256" y="3101009"/>
+                </a:lnTo>
+                <a:lnTo>
+                  <a:pt x="5267291" y="3101009"/>
+                </a:lnTo>
+                <a:lnTo>
+                  <a:pt x="5323326" y="3101009"/>
+                </a:lnTo>
+                <a:lnTo>
+                  <a:pt x="5379361" y="3101009"/>
+                </a:lnTo>
+                <a:lnTo>
+                  <a:pt x="5435396" y="3101009"/>
+                </a:lnTo>
+                <a:lnTo>
+                  <a:pt x="5491431" y="3101009"/>
+                </a:lnTo>
+                <a:lnTo>
+                  <a:pt x="5547466" y="3101009"/>
+                </a:lnTo>
+                <a:lnTo>
+                  <a:pt x="5603501" y="3101009"/>
+                </a:lnTo>
+                <a:lnTo>
+                  <a:pt x="5659536" y="3101009"/>
+                </a:lnTo>
+                <a:lnTo>
+                  <a:pt x="5715571" y="3101009"/>
+                </a:lnTo>
+                <a:lnTo>
+                  <a:pt x="5771606" y="3101009"/>
+                </a:lnTo>
+                <a:lnTo>
+                  <a:pt x="5827641" y="3101009"/>
+                </a:lnTo>
+                <a:lnTo>
+                  <a:pt x="5883676" y="3101009"/>
+                </a:lnTo>
+                <a:lnTo>
+                  <a:pt x="5939711" y="3101009"/>
+                </a:lnTo>
+                <a:lnTo>
+                  <a:pt x="5995746" y="3101009"/>
+                </a:lnTo>
+                <a:lnTo>
+                  <a:pt x="6051781" y="3101009"/>
+                </a:lnTo>
+                <a:lnTo>
+                  <a:pt x="6107816" y="3101009"/>
+                </a:lnTo>
+                <a:lnTo>
+                  <a:pt x="6163851" y="3101009"/>
+                </a:lnTo>
+                <a:lnTo>
+                  <a:pt x="6219886" y="3101009"/>
+                </a:lnTo>
+                <a:lnTo>
+                  <a:pt x="6275921" y="3101009"/>
+                </a:lnTo>
+                <a:lnTo>
+                  <a:pt x="6331956" y="3101009"/>
+                </a:lnTo>
+                <a:lnTo>
+                  <a:pt x="6387991" y="3101009"/>
+                </a:lnTo>
+              </a:path>
+            </a:pathLst>
+          </a:custGeom>
+          <a:noFill/>
+          <a:ln w="20320">
+            <a:solidFill>
+              <a:srgbClr val="B4C7D2"/>
+            </a:solidFill>
+            <a:prstDash val="dash"/>
+          </a:ln>
+          <a:effectLst/>
+        </p:spPr>
+        <p:txBody>
+          <a:bodyPr rtlCol="0" anchor="ctr"/>
+          <a:lstStyle/>
+          <a:p>
+            <a:pPr algn="ctr"/>
+          </a:p>
+        </p:txBody>
+      </p:sp>
+      <p:sp>
+        <p:nvSpPr>
+          <p:cNvPr id="30" name="C3-E26 polygon 28" descr="sci-ppt:o028"/>
+          <p:cNvSpPr/>
+          <p:nvPr/>
+        </p:nvSpPr>
+        <p:spPr>
+          <a:xfrm>
+            <a:off x="914400" y="1866225"/>
+            <a:ext cx="6387991" cy="3071535"/>
+          </a:xfrm>
+          <a:custGeom>
+            <a:avLst/>
+            <a:gdLst/>
+            <a:ahLst/>
+            <a:cxnLst/>
+            <a:rect l="l" t="t" r="r" b="b"/>
+            <a:pathLst>
+              <a:path w="6387991" h="3071535">
+                <a:moveTo>
+                  <a:pt x="0" y="3040509"/>
+                </a:moveTo>
+                <a:lnTo>
+                  <a:pt x="56035" y="2606151"/>
+                </a:lnTo>
+                <a:lnTo>
+                  <a:pt x="112070" y="2171792"/>
+                </a:lnTo>
+                <a:lnTo>
+                  <a:pt x="168105" y="1737434"/>
+                </a:lnTo>
+                <a:lnTo>
+                  <a:pt x="224140" y="1303075"/>
+                </a:lnTo>
+                <a:lnTo>
+                  <a:pt x="280175" y="868717"/>
+                </a:lnTo>
+                <a:lnTo>
+                  <a:pt x="336210" y="434359"/>
+                </a:lnTo>
+                <a:lnTo>
+                  <a:pt x="392245" y="0"/>
+                </a:lnTo>
+                <a:lnTo>
+                  <a:pt x="448280" y="0"/>
+                </a:lnTo>
+                <a:lnTo>
+                  <a:pt x="504315" y="0"/>
+                </a:lnTo>
+                <a:lnTo>
+                  <a:pt x="560350" y="0"/>
+                </a:lnTo>
+                <a:lnTo>
+                  <a:pt x="616385" y="0"/>
+                </a:lnTo>
+                <a:lnTo>
+                  <a:pt x="672420" y="0"/>
+                </a:lnTo>
+                <a:lnTo>
+                  <a:pt x="728455" y="0"/>
+                </a:lnTo>
+                <a:lnTo>
+                  <a:pt x="784490" y="0"/>
+                </a:lnTo>
+                <a:lnTo>
+                  <a:pt x="840525" y="0"/>
+                </a:lnTo>
+                <a:lnTo>
+                  <a:pt x="896560" y="0"/>
+                </a:lnTo>
+                <a:lnTo>
+                  <a:pt x="952595" y="0"/>
+                </a:lnTo>
+                <a:lnTo>
+                  <a:pt x="1008630" y="0"/>
+                </a:lnTo>
+                <a:lnTo>
+                  <a:pt x="1064665" y="0"/>
+                </a:lnTo>
+                <a:lnTo>
+                  <a:pt x="1120700" y="0"/>
+                </a:lnTo>
+                <a:lnTo>
+                  <a:pt x="1176735" y="0"/>
+                </a:lnTo>
+                <a:lnTo>
+                  <a:pt x="1232770" y="0"/>
+                </a:lnTo>
+                <a:lnTo>
+                  <a:pt x="1288805" y="0"/>
+                </a:lnTo>
+                <a:lnTo>
+                  <a:pt x="1344840" y="0"/>
+                </a:lnTo>
+                <a:lnTo>
+                  <a:pt x="1400875" y="403333"/>
+                </a:lnTo>
+                <a:lnTo>
+                  <a:pt x="1456910" y="837691"/>
+                </a:lnTo>
+                <a:lnTo>
+                  <a:pt x="1512945" y="1272050"/>
+                </a:lnTo>
+                <a:lnTo>
+                  <a:pt x="1568980" y="1706408"/>
+                </a:lnTo>
+                <a:lnTo>
+                  <a:pt x="1625015" y="2140767"/>
+                </a:lnTo>
+                <a:lnTo>
+                  <a:pt x="1681050" y="2575125"/>
+                </a:lnTo>
+                <a:lnTo>
+                  <a:pt x="1737085" y="3009483"/>
+                </a:lnTo>
+                <a:lnTo>
+                  <a:pt x="1793120" y="3071535"/>
+                </a:lnTo>
+                <a:lnTo>
+                  <a:pt x="1849155" y="3071535"/>
+                </a:lnTo>
+                <a:lnTo>
+                  <a:pt x="1905190" y="3071535"/>
+                </a:lnTo>
+                <a:lnTo>
+                  <a:pt x="1961225" y="3071535"/>
+                </a:lnTo>
+                <a:lnTo>
+                  <a:pt x="2017260" y="3071535"/>
+                </a:lnTo>
+                <a:lnTo>
+                  <a:pt x="2073295" y="3071535"/>
+                </a:lnTo>
+                <a:lnTo>
+                  <a:pt x="2129330" y="3071535"/>
+                </a:lnTo>
+                <a:lnTo>
+                  <a:pt x="2185365" y="3071535"/>
+                </a:lnTo>
+                <a:lnTo>
+                  <a:pt x="2241400" y="3071535"/>
+                </a:lnTo>
+                <a:lnTo>
+                  <a:pt x="2297435" y="3071535"/>
+                </a:lnTo>
+                <a:lnTo>
+                  <a:pt x="2353470" y="3071535"/>
+                </a:lnTo>
+                <a:lnTo>
+                  <a:pt x="2409505" y="3071535"/>
+                </a:lnTo>
+                <a:lnTo>
+                  <a:pt x="2465540" y="3071535"/>
+                </a:lnTo>
+                <a:lnTo>
+                  <a:pt x="2521575" y="3071535"/>
+                </a:lnTo>
+                <a:lnTo>
+                  <a:pt x="2577610" y="3071535"/>
+                </a:lnTo>
+                <a:lnTo>
+                  <a:pt x="2633645" y="3071535"/>
+                </a:lnTo>
+                <a:lnTo>
+                  <a:pt x="2689680" y="3071535"/>
+                </a:lnTo>
+                <a:lnTo>
+                  <a:pt x="2745715" y="3071535"/>
+                </a:lnTo>
+                <a:lnTo>
+                  <a:pt x="2801750" y="3071535"/>
+                </a:lnTo>
+                <a:lnTo>
+                  <a:pt x="2857785" y="3071535"/>
+                </a:lnTo>
+                <a:lnTo>
+                  <a:pt x="2913820" y="3071535"/>
+                </a:lnTo>
+                <a:lnTo>
+                  <a:pt x="2969855" y="3071535"/>
+                </a:lnTo>
+                <a:lnTo>
+                  <a:pt x="3025890" y="3071535"/>
+                </a:lnTo>
+                <a:lnTo>
+                  <a:pt x="3081925" y="3071535"/>
+                </a:lnTo>
+                <a:lnTo>
+                  <a:pt x="3137960" y="3071535"/>
+                </a:lnTo>
+                <a:lnTo>
+                  <a:pt x="3193995" y="3071535"/>
+                </a:lnTo>
+                <a:lnTo>
+                  <a:pt x="3250031" y="3071535"/>
+                </a:lnTo>
+                <a:lnTo>
+                  <a:pt x="3306066" y="3071535"/>
+                </a:lnTo>
+                <a:lnTo>
+                  <a:pt x="3362101" y="3071535"/>
+                </a:lnTo>
+                <a:lnTo>
+                  <a:pt x="3418136" y="3071535"/>
+                </a:lnTo>
+                <a:lnTo>
+                  <a:pt x="3474171" y="3071535"/>
+                </a:lnTo>
+                <a:lnTo>
+                  <a:pt x="3530206" y="3071535"/>
+                </a:lnTo>
+                <a:lnTo>
+                  <a:pt x="3586241" y="3071535"/>
+                </a:lnTo>
+                <a:lnTo>
+                  <a:pt x="3642276" y="3071535"/>
+                </a:lnTo>
+                <a:lnTo>
+                  <a:pt x="3698311" y="3071535"/>
+                </a:lnTo>
+                <a:lnTo>
+                  <a:pt x="3754346" y="3071535"/>
+                </a:lnTo>
+                <a:lnTo>
+                  <a:pt x="3810381" y="3071535"/>
+                </a:lnTo>
+                <a:lnTo>
+                  <a:pt x="3866416" y="3071535"/>
+                </a:lnTo>
+                <a:lnTo>
+                  <a:pt x="3922451" y="3071535"/>
+                </a:lnTo>
+                <a:lnTo>
+                  <a:pt x="3978486" y="3071535"/>
+                </a:lnTo>
+                <a:lnTo>
+                  <a:pt x="4034521" y="3071535"/>
+                </a:lnTo>
+                <a:lnTo>
+                  <a:pt x="4090556" y="3071535"/>
+                </a:lnTo>
+                <a:lnTo>
+                  <a:pt x="4146591" y="3071535"/>
+                </a:lnTo>
+                <a:lnTo>
+                  <a:pt x="4202626" y="3071535"/>
+                </a:lnTo>
+                <a:lnTo>
+                  <a:pt x="4258661" y="3071535"/>
+                </a:lnTo>
+                <a:lnTo>
+                  <a:pt x="4314696" y="3071535"/>
+                </a:lnTo>
+                <a:lnTo>
+                  <a:pt x="4370731" y="3071535"/>
+                </a:lnTo>
+                <a:lnTo>
+                  <a:pt x="4426766" y="3071535"/>
+                </a:lnTo>
+                <a:lnTo>
+                  <a:pt x="4482801" y="3071535"/>
+                </a:lnTo>
+                <a:lnTo>
+                  <a:pt x="4538836" y="3071535"/>
+                </a:lnTo>
+                <a:lnTo>
+                  <a:pt x="4594871" y="3071535"/>
+                </a:lnTo>
+                <a:lnTo>
+                  <a:pt x="4650906" y="3071535"/>
+                </a:lnTo>
+                <a:lnTo>
+                  <a:pt x="4706941" y="3071535"/>
+                </a:lnTo>
+                <a:lnTo>
+                  <a:pt x="4762976" y="3071535"/>
+                </a:lnTo>
+                <a:lnTo>
+                  <a:pt x="4819011" y="3071535"/>
+                </a:lnTo>
+                <a:lnTo>
+                  <a:pt x="4875046" y="3071535"/>
+                </a:lnTo>
+                <a:lnTo>
+                  <a:pt x="4931081" y="3071535"/>
+                </a:lnTo>
+                <a:lnTo>
+                  <a:pt x="4987116" y="3071535"/>
+                </a:lnTo>
+                <a:lnTo>
+                  <a:pt x="5043151" y="3071535"/>
+                </a:lnTo>
+                <a:lnTo>
+                  <a:pt x="5099186" y="3071535"/>
+                </a:lnTo>
+                <a:lnTo>
+                  <a:pt x="5155221" y="3071535"/>
+                </a:lnTo>
+                <a:lnTo>
+                  <a:pt x="5211256" y="3071535"/>
+                </a:lnTo>
+                <a:lnTo>
+                  <a:pt x="5267291" y="3071535"/>
+                </a:lnTo>
+                <a:lnTo>
+                  <a:pt x="5323326" y="3071535"/>
+                </a:lnTo>
+                <a:lnTo>
+                  <a:pt x="5379361" y="3071535"/>
+                </a:lnTo>
+                <a:lnTo>
+                  <a:pt x="5435396" y="3071535"/>
+                </a:lnTo>
+                <a:lnTo>
+                  <a:pt x="5491431" y="3071535"/>
+                </a:lnTo>
+                <a:lnTo>
+                  <a:pt x="5547466" y="3071535"/>
+                </a:lnTo>
+                <a:lnTo>
+                  <a:pt x="5603501" y="3071535"/>
+                </a:lnTo>
+                <a:lnTo>
+                  <a:pt x="5659536" y="3071535"/>
+                </a:lnTo>
+                <a:lnTo>
+                  <a:pt x="5715571" y="3071535"/>
+                </a:lnTo>
+                <a:lnTo>
+                  <a:pt x="5771606" y="3071535"/>
+                </a:lnTo>
+                <a:lnTo>
+                  <a:pt x="5827641" y="3071535"/>
+                </a:lnTo>
+                <a:lnTo>
+                  <a:pt x="5883676" y="3071535"/>
+                </a:lnTo>
+                <a:lnTo>
+                  <a:pt x="5939711" y="3071535"/>
+                </a:lnTo>
+                <a:lnTo>
+                  <a:pt x="5995746" y="3071535"/>
+                </a:lnTo>
+                <a:lnTo>
+                  <a:pt x="6051781" y="3071535"/>
+                </a:lnTo>
+                <a:lnTo>
+                  <a:pt x="6107816" y="3071535"/>
+                </a:lnTo>
+                <a:lnTo>
+                  <a:pt x="6163851" y="3071535"/>
+                </a:lnTo>
+                <a:lnTo>
+                  <a:pt x="6219886" y="3071535"/>
+                </a:lnTo>
+                <a:lnTo>
+                  <a:pt x="6275921" y="3071535"/>
+                </a:lnTo>
+                <a:lnTo>
+                  <a:pt x="6331956" y="3071535"/>
+                </a:lnTo>
+                <a:lnTo>
+                  <a:pt x="6387991" y="3071535"/>
+                </a:lnTo>
+              </a:path>
+            </a:pathLst>
+          </a:custGeom>
+          <a:noFill/>
+          <a:ln w="38100">
+            <a:solidFill>
+              <a:srgbClr val="8EDBD4"/>
+            </a:solidFill>
+          </a:ln>
+          <a:effectLst/>
+        </p:spPr>
+        <p:txBody>
+          <a:bodyPr rtlCol="0" anchor="ctr"/>
+          <a:lstStyle/>
+          <a:p>
+            <a:pPr algn="ctr"/>
+          </a:p>
+        </p:txBody>
+      </p:sp>
+      <p:sp>
+        <p:nvSpPr>
+          <p:cNvPr id="31" name="C3-E26 polygon 29" descr="sci-ppt:o029"/>
+          <p:cNvSpPr/>
+          <p:nvPr/>
+        </p:nvSpPr>
+        <p:spPr>
+          <a:xfrm>
+            <a:off x="914400" y="1842894"/>
+            <a:ext cx="6387991" cy="3094866"/>
+          </a:xfrm>
+          <a:custGeom>
+            <a:avLst/>
+            <a:gdLst/>
+            <a:ahLst/>
+            <a:cxnLst/>
+            <a:rect l="l" t="t" r="r" b="b"/>
+            <a:pathLst>
+              <a:path w="6387991" h="3094866">
+                <a:moveTo>
+                  <a:pt x="0" y="3085682"/>
+                </a:moveTo>
+                <a:lnTo>
+                  <a:pt x="56035" y="2957112"/>
+                </a:lnTo>
+                <a:lnTo>
+                  <a:pt x="112070" y="2828542"/>
+                </a:lnTo>
+                <a:lnTo>
+                  <a:pt x="168105" y="2699972"/>
+                </a:lnTo>
+                <a:lnTo>
+                  <a:pt x="224140" y="2571402"/>
+                </a:lnTo>
+                <a:lnTo>
+                  <a:pt x="280175" y="2442831"/>
+                </a:lnTo>
+                <a:lnTo>
+                  <a:pt x="336210" y="2314261"/>
+                </a:lnTo>
+                <a:lnTo>
+                  <a:pt x="392245" y="2185691"/>
+                </a:lnTo>
+                <a:lnTo>
+                  <a:pt x="448280" y="2057121"/>
+                </a:lnTo>
+                <a:lnTo>
+                  <a:pt x="504315" y="1928551"/>
+                </a:lnTo>
+                <a:lnTo>
+                  <a:pt x="560350" y="1799981"/>
+                </a:lnTo>
+                <a:lnTo>
+                  <a:pt x="616385" y="1671411"/>
+                </a:lnTo>
+                <a:lnTo>
+                  <a:pt x="672420" y="1542841"/>
+                </a:lnTo>
+                <a:lnTo>
+                  <a:pt x="728455" y="1414271"/>
+                </a:lnTo>
+                <a:lnTo>
+                  <a:pt x="784490" y="1285701"/>
+                </a:lnTo>
+                <a:lnTo>
+                  <a:pt x="840525" y="1157131"/>
+                </a:lnTo>
+                <a:lnTo>
+                  <a:pt x="896560" y="1028561"/>
+                </a:lnTo>
+                <a:lnTo>
+                  <a:pt x="952595" y="899990"/>
+                </a:lnTo>
+                <a:lnTo>
+                  <a:pt x="1008630" y="771420"/>
+                </a:lnTo>
+                <a:lnTo>
+                  <a:pt x="1064665" y="642850"/>
+                </a:lnTo>
+                <a:lnTo>
+                  <a:pt x="1120700" y="514280"/>
+                </a:lnTo>
+                <a:lnTo>
+                  <a:pt x="1176735" y="385710"/>
+                </a:lnTo>
+                <a:lnTo>
+                  <a:pt x="1232770" y="257140"/>
+                </a:lnTo>
+                <a:lnTo>
+                  <a:pt x="1288805" y="128570"/>
+                </a:lnTo>
+                <a:lnTo>
+                  <a:pt x="1344840" y="0"/>
+                </a:lnTo>
+                <a:lnTo>
+                  <a:pt x="1400875" y="119386"/>
+                </a:lnTo>
+                <a:lnTo>
+                  <a:pt x="1456910" y="247956"/>
+                </a:lnTo>
+                <a:lnTo>
+                  <a:pt x="1512945" y="376527"/>
+                </a:lnTo>
+                <a:lnTo>
+                  <a:pt x="1568980" y="505097"/>
+                </a:lnTo>
+                <a:lnTo>
+                  <a:pt x="1625015" y="633667"/>
+                </a:lnTo>
+                <a:lnTo>
+                  <a:pt x="1681050" y="762237"/>
+                </a:lnTo>
+                <a:lnTo>
+                  <a:pt x="1737085" y="890807"/>
+                </a:lnTo>
+                <a:lnTo>
+                  <a:pt x="1793120" y="1019377"/>
+                </a:lnTo>
+                <a:lnTo>
+                  <a:pt x="1849155" y="1147947"/>
+                </a:lnTo>
+                <a:lnTo>
+                  <a:pt x="1905190" y="1276517"/>
+                </a:lnTo>
+                <a:lnTo>
+                  <a:pt x="1961225" y="1405087"/>
+                </a:lnTo>
+                <a:lnTo>
+                  <a:pt x="2017260" y="1533657"/>
+                </a:lnTo>
+                <a:lnTo>
+                  <a:pt x="2073295" y="1662227"/>
+                </a:lnTo>
+                <a:lnTo>
+                  <a:pt x="2129330" y="1790797"/>
+                </a:lnTo>
+                <a:lnTo>
+                  <a:pt x="2185365" y="1919368"/>
+                </a:lnTo>
+                <a:lnTo>
+                  <a:pt x="2241400" y="2047938"/>
+                </a:lnTo>
+                <a:lnTo>
+                  <a:pt x="2297435" y="2176508"/>
+                </a:lnTo>
+                <a:lnTo>
+                  <a:pt x="2353470" y="2305078"/>
+                </a:lnTo>
+                <a:lnTo>
+                  <a:pt x="2409505" y="2433648"/>
+                </a:lnTo>
+                <a:lnTo>
+                  <a:pt x="2465540" y="2562218"/>
+                </a:lnTo>
+                <a:lnTo>
+                  <a:pt x="2521575" y="2690788"/>
+                </a:lnTo>
+                <a:lnTo>
+                  <a:pt x="2577610" y="2819358"/>
+                </a:lnTo>
+                <a:lnTo>
+                  <a:pt x="2633645" y="2947928"/>
+                </a:lnTo>
+                <a:lnTo>
+                  <a:pt x="2689680" y="3076498"/>
+                </a:lnTo>
+                <a:lnTo>
+                  <a:pt x="2745715" y="3094866"/>
+                </a:lnTo>
+                <a:lnTo>
+                  <a:pt x="2801750" y="3094866"/>
+                </a:lnTo>
+                <a:lnTo>
+                  <a:pt x="2857785" y="3094866"/>
+                </a:lnTo>
+                <a:lnTo>
+                  <a:pt x="2913820" y="3094866"/>
+                </a:lnTo>
+                <a:lnTo>
+                  <a:pt x="2969855" y="3094866"/>
+                </a:lnTo>
+                <a:lnTo>
+                  <a:pt x="3025890" y="3094866"/>
+                </a:lnTo>
+                <a:lnTo>
+                  <a:pt x="3081925" y="3094866"/>
+                </a:lnTo>
+                <a:lnTo>
+                  <a:pt x="3137960" y="3094866"/>
+                </a:lnTo>
+                <a:lnTo>
+                  <a:pt x="3193995" y="3094866"/>
+                </a:lnTo>
+                <a:lnTo>
+                  <a:pt x="3250031" y="3094866"/>
+                </a:lnTo>
+                <a:lnTo>
+                  <a:pt x="3306066" y="3094866"/>
+                </a:lnTo>
+                <a:lnTo>
+                  <a:pt x="3362101" y="3094866"/>
+                </a:lnTo>
+                <a:lnTo>
+                  <a:pt x="3418136" y="3094866"/>
+                </a:lnTo>
+                <a:lnTo>
+                  <a:pt x="3474171" y="3094866"/>
+                </a:lnTo>
+                <a:lnTo>
+                  <a:pt x="3530206" y="3094866"/>
+                </a:lnTo>
+                <a:lnTo>
+                  <a:pt x="3586241" y="3094866"/>
+                </a:lnTo>
+                <a:lnTo>
+                  <a:pt x="3642276" y="3094866"/>
+                </a:lnTo>
+                <a:lnTo>
+                  <a:pt x="3698311" y="3094866"/>
+                </a:lnTo>
+                <a:lnTo>
+                  <a:pt x="3754346" y="3094866"/>
+                </a:lnTo>
+                <a:lnTo>
+                  <a:pt x="3810381" y="3094866"/>
+                </a:lnTo>
+                <a:lnTo>
+                  <a:pt x="3866416" y="3094866"/>
+                </a:lnTo>
+                <a:lnTo>
+                  <a:pt x="3922451" y="3094866"/>
+                </a:lnTo>
+                <a:lnTo>
+                  <a:pt x="3978486" y="3094866"/>
+                </a:lnTo>
+                <a:lnTo>
+                  <a:pt x="4034521" y="3094866"/>
+                </a:lnTo>
+                <a:lnTo>
+                  <a:pt x="4090556" y="3094866"/>
+                </a:lnTo>
+                <a:lnTo>
+                  <a:pt x="4146591" y="3094866"/>
+                </a:lnTo>
+                <a:lnTo>
+                  <a:pt x="4202626" y="3094866"/>
+                </a:lnTo>
+                <a:lnTo>
+                  <a:pt x="4258661" y="3094866"/>
+                </a:lnTo>
+                <a:lnTo>
+                  <a:pt x="4314696" y="3094866"/>
+                </a:lnTo>
+                <a:lnTo>
+                  <a:pt x="4370731" y="3094866"/>
+                </a:lnTo>
+                <a:lnTo>
+                  <a:pt x="4426766" y="3094866"/>
+                </a:lnTo>
+                <a:lnTo>
+                  <a:pt x="4482801" y="3094866"/>
+                </a:lnTo>
+                <a:lnTo>
+                  <a:pt x="4538836" y="3094866"/>
+                </a:lnTo>
+                <a:lnTo>
+                  <a:pt x="4594871" y="3094866"/>
+                </a:lnTo>
+                <a:lnTo>
+                  <a:pt x="4650906" y="3094866"/>
+                </a:lnTo>
+                <a:lnTo>
+                  <a:pt x="4706941" y="3094866"/>
+                </a:lnTo>
+                <a:lnTo>
+                  <a:pt x="4762976" y="3094866"/>
+                </a:lnTo>
+                <a:lnTo>
+                  <a:pt x="4819011" y="3094866"/>
+                </a:lnTo>
+                <a:lnTo>
+                  <a:pt x="4875046" y="3094866"/>
+                </a:lnTo>
+                <a:lnTo>
+                  <a:pt x="4931081" y="3094866"/>
+                </a:lnTo>
+                <a:lnTo>
+                  <a:pt x="4987116" y="3094866"/>
+                </a:lnTo>
+                <a:lnTo>
+                  <a:pt x="5043151" y="3094866"/>
+                </a:lnTo>
+                <a:lnTo>
+                  <a:pt x="5099186" y="3094866"/>
+                </a:lnTo>
+                <a:lnTo>
+                  <a:pt x="5155221" y="3094866"/>
+                </a:lnTo>
+                <a:lnTo>
+                  <a:pt x="5211256" y="3094866"/>
+                </a:lnTo>
+                <a:lnTo>
+                  <a:pt x="5267291" y="3094866"/>
+                </a:lnTo>
+                <a:lnTo>
+                  <a:pt x="5323326" y="3094866"/>
+                </a:lnTo>
+                <a:lnTo>
+                  <a:pt x="5379361" y="3094866"/>
+                </a:lnTo>
+                <a:lnTo>
+                  <a:pt x="5435396" y="3094866"/>
+                </a:lnTo>
+                <a:lnTo>
+                  <a:pt x="5491431" y="3094866"/>
+                </a:lnTo>
+                <a:lnTo>
+                  <a:pt x="5547466" y="3094866"/>
+                </a:lnTo>
+                <a:lnTo>
+                  <a:pt x="5603501" y="3094866"/>
+                </a:lnTo>
+                <a:lnTo>
+                  <a:pt x="5659536" y="3094866"/>
+                </a:lnTo>
+                <a:lnTo>
+                  <a:pt x="5715571" y="3094866"/>
+                </a:lnTo>
+                <a:lnTo>
+                  <a:pt x="5771606" y="3094866"/>
+                </a:lnTo>
+                <a:lnTo>
+                  <a:pt x="5827641" y="3094866"/>
+                </a:lnTo>
+                <a:lnTo>
+                  <a:pt x="5883676" y="3094866"/>
+                </a:lnTo>
+                <a:lnTo>
+                  <a:pt x="5939711" y="3094866"/>
+                </a:lnTo>
+                <a:lnTo>
+                  <a:pt x="5995746" y="3094866"/>
+                </a:lnTo>
+                <a:lnTo>
+                  <a:pt x="6051781" y="3094866"/>
+                </a:lnTo>
+                <a:lnTo>
+                  <a:pt x="6107816" y="3094866"/>
+                </a:lnTo>
+                <a:lnTo>
+                  <a:pt x="6163851" y="3094866"/>
+                </a:lnTo>
+                <a:lnTo>
+                  <a:pt x="6219886" y="3094866"/>
+                </a:lnTo>
+                <a:lnTo>
+                  <a:pt x="6275921" y="3094866"/>
+                </a:lnTo>
+                <a:lnTo>
+                  <a:pt x="6331956" y="3094866"/>
+                </a:lnTo>
+                <a:lnTo>
+                  <a:pt x="6387991" y="3094866"/>
+                </a:lnTo>
+              </a:path>
+            </a:pathLst>
+          </a:custGeom>
+          <a:noFill/>
+          <a:ln w="38100">
+            <a:solidFill>
+              <a:srgbClr val="F2B880"/>
+            </a:solidFill>
+          </a:ln>
+          <a:effectLst/>
+        </p:spPr>
+        <p:txBody>
+          <a:bodyPr rtlCol="0" anchor="ctr"/>
+          <a:lstStyle/>
+          <a:p>
+            <a:pPr algn="ctr"/>
+          </a:p>
+        </p:txBody>
+      </p:sp>
+      <p:cxnSp>
+        <p:nvCxnSpPr>
+          <p:cNvPr id="32" name="C3-E26 line 30" descr="sci-ppt:o030"/>
+          <p:cNvCxnSpPr/>
+          <p:nvPr/>
+        </p:nvCxnSpPr>
+        <p:spPr>
+          <a:xfrm>
+            <a:off x="914400" y="1836751"/>
+            <a:ext cx="6400800" cy="0"/>
+          </a:xfrm>
+          <a:prstGeom prst="line">
+            <a:avLst/>
+          </a:prstGeom>
+          <a:ln w="15240">
+            <a:solidFill>
+              <a:srgbClr val="F2B880"/>
+            </a:solidFill>
+            <a:prstDash val="dash"/>
+          </a:ln>
+          <a:effectLst/>
+        </p:spPr>
+      </p:cxnSp>
+      <p:sp>
+        <p:nvSpPr>
+          <p:cNvPr id="33" name="C3-E26 polygon 31" descr="sci-ppt:o031"/>
+          <p:cNvSpPr/>
+          <p:nvPr/>
+        </p:nvSpPr>
+        <p:spPr>
+          <a:xfrm>
+            <a:off x="914400" y="3889094"/>
+            <a:ext cx="6387991" cy="1048666"/>
+          </a:xfrm>
+          <a:custGeom>
+            <a:avLst/>
+            <a:gdLst/>
+            <a:ahLst/>
+            <a:cxnLst/>
+            <a:rect l="l" t="t" r="r" b="b"/>
+            <a:pathLst>
+              <a:path w="6387991" h="1048666">
+                <a:moveTo>
+                  <a:pt x="0" y="1045563"/>
+                </a:moveTo>
+                <a:lnTo>
+                  <a:pt x="56035" y="1002127"/>
+                </a:lnTo>
+                <a:lnTo>
+                  <a:pt x="112070" y="958691"/>
+                </a:lnTo>
+                <a:lnTo>
+                  <a:pt x="168105" y="915255"/>
+                </a:lnTo>
+                <a:lnTo>
+                  <a:pt x="224140" y="871820"/>
+                </a:lnTo>
+                <a:lnTo>
+                  <a:pt x="280175" y="828384"/>
+                </a:lnTo>
+                <a:lnTo>
+                  <a:pt x="336210" y="784948"/>
+                </a:lnTo>
+                <a:lnTo>
+                  <a:pt x="392245" y="741512"/>
+                </a:lnTo>
+                <a:lnTo>
+                  <a:pt x="448280" y="698076"/>
+                </a:lnTo>
+                <a:lnTo>
+                  <a:pt x="504315" y="654640"/>
+                </a:lnTo>
+                <a:lnTo>
+                  <a:pt x="560350" y="611205"/>
+                </a:lnTo>
+                <a:lnTo>
+                  <a:pt x="616385" y="567769"/>
+                </a:lnTo>
+                <a:lnTo>
+                  <a:pt x="672420" y="524333"/>
+                </a:lnTo>
+                <a:lnTo>
+                  <a:pt x="728455" y="480897"/>
+                </a:lnTo>
+                <a:lnTo>
+                  <a:pt x="784490" y="437461"/>
+                </a:lnTo>
+                <a:lnTo>
+                  <a:pt x="840525" y="394025"/>
+                </a:lnTo>
+                <a:lnTo>
+                  <a:pt x="896560" y="350590"/>
+                </a:lnTo>
+                <a:lnTo>
+                  <a:pt x="952595" y="307154"/>
+                </a:lnTo>
+                <a:lnTo>
+                  <a:pt x="1008630" y="263718"/>
+                </a:lnTo>
+                <a:lnTo>
+                  <a:pt x="1064665" y="220282"/>
+                </a:lnTo>
+                <a:lnTo>
+                  <a:pt x="1120700" y="176846"/>
+                </a:lnTo>
+                <a:lnTo>
+                  <a:pt x="1176735" y="133410"/>
+                </a:lnTo>
+                <a:lnTo>
+                  <a:pt x="1232770" y="89974"/>
+                </a:lnTo>
+                <a:lnTo>
+                  <a:pt x="1288805" y="46539"/>
+                </a:lnTo>
+                <a:lnTo>
+                  <a:pt x="1344840" y="3103"/>
+                </a:lnTo>
+                <a:lnTo>
+                  <a:pt x="1400875" y="0"/>
+                </a:lnTo>
+                <a:lnTo>
+                  <a:pt x="1456910" y="0"/>
+                </a:lnTo>
+                <a:lnTo>
+                  <a:pt x="1512945" y="0"/>
+                </a:lnTo>
+                <a:lnTo>
+                  <a:pt x="1568980" y="0"/>
+                </a:lnTo>
+                <a:lnTo>
+                  <a:pt x="1625015" y="0"/>
+                </a:lnTo>
+                <a:lnTo>
+                  <a:pt x="1681050" y="0"/>
+                </a:lnTo>
+                <a:lnTo>
+                  <a:pt x="1737085" y="0"/>
+                </a:lnTo>
+                <a:lnTo>
+                  <a:pt x="1793120" y="0"/>
+                </a:lnTo>
+                <a:lnTo>
+                  <a:pt x="1849155" y="0"/>
+                </a:lnTo>
+                <a:lnTo>
+                  <a:pt x="1905190" y="0"/>
+                </a:lnTo>
+                <a:lnTo>
+                  <a:pt x="1961225" y="0"/>
+                </a:lnTo>
+                <a:lnTo>
+                  <a:pt x="2017260" y="0"/>
+                </a:lnTo>
+                <a:lnTo>
+                  <a:pt x="2073295" y="0"/>
+                </a:lnTo>
+                <a:lnTo>
+                  <a:pt x="2129330" y="0"/>
+                </a:lnTo>
+                <a:lnTo>
+                  <a:pt x="2185365" y="0"/>
+                </a:lnTo>
+                <a:lnTo>
+                  <a:pt x="2241400" y="0"/>
+                </a:lnTo>
+                <a:lnTo>
+                  <a:pt x="2297435" y="0"/>
+                </a:lnTo>
+                <a:lnTo>
+                  <a:pt x="2353470" y="0"/>
+                </a:lnTo>
+                <a:lnTo>
+                  <a:pt x="2409505" y="0"/>
+                </a:lnTo>
+                <a:lnTo>
+                  <a:pt x="2465540" y="0"/>
+                </a:lnTo>
+                <a:lnTo>
+                  <a:pt x="2521575" y="0"/>
+                </a:lnTo>
+                <a:lnTo>
+                  <a:pt x="2577610" y="0"/>
+                </a:lnTo>
+                <a:lnTo>
+                  <a:pt x="2633645" y="0"/>
+                </a:lnTo>
+                <a:lnTo>
+                  <a:pt x="2689680" y="0"/>
+                </a:lnTo>
+                <a:lnTo>
+                  <a:pt x="2745715" y="0"/>
+                </a:lnTo>
+                <a:lnTo>
+                  <a:pt x="2801750" y="0"/>
+                </a:lnTo>
+                <a:lnTo>
+                  <a:pt x="2857785" y="0"/>
+                </a:lnTo>
+                <a:lnTo>
+                  <a:pt x="2913820" y="0"/>
+                </a:lnTo>
+                <a:lnTo>
+                  <a:pt x="2969855" y="0"/>
+                </a:lnTo>
+                <a:lnTo>
+                  <a:pt x="3025890" y="0"/>
+                </a:lnTo>
+                <a:lnTo>
+                  <a:pt x="3081925" y="0"/>
+                </a:lnTo>
+                <a:lnTo>
+                  <a:pt x="3137960" y="0"/>
+                </a:lnTo>
+                <a:lnTo>
+                  <a:pt x="3193995" y="0"/>
+                </a:lnTo>
+                <a:lnTo>
+                  <a:pt x="3250031" y="0"/>
+                </a:lnTo>
+                <a:lnTo>
+                  <a:pt x="3306066" y="0"/>
+                </a:lnTo>
+                <a:lnTo>
+                  <a:pt x="3362101" y="0"/>
+                </a:lnTo>
+                <a:lnTo>
+                  <a:pt x="3418136" y="0"/>
+                </a:lnTo>
+                <a:lnTo>
+                  <a:pt x="3474171" y="0"/>
+                </a:lnTo>
+                <a:lnTo>
+                  <a:pt x="3530206" y="0"/>
+                </a:lnTo>
+                <a:lnTo>
+                  <a:pt x="3586241" y="0"/>
+                </a:lnTo>
+                <a:lnTo>
+                  <a:pt x="3642276" y="0"/>
+                </a:lnTo>
+                <a:lnTo>
+                  <a:pt x="3698311" y="0"/>
+                </a:lnTo>
+                <a:lnTo>
+                  <a:pt x="3754346" y="0"/>
+                </a:lnTo>
+                <a:lnTo>
+                  <a:pt x="3810381" y="0"/>
+                </a:lnTo>
+                <a:lnTo>
+                  <a:pt x="3866416" y="0"/>
+                </a:lnTo>
+                <a:lnTo>
+                  <a:pt x="3922451" y="0"/>
+                </a:lnTo>
+                <a:lnTo>
+                  <a:pt x="3978486" y="0"/>
+                </a:lnTo>
+                <a:lnTo>
+                  <a:pt x="4034521" y="31026"/>
+                </a:lnTo>
+                <a:lnTo>
+                  <a:pt x="4090556" y="74462"/>
+                </a:lnTo>
+                <a:lnTo>
+                  <a:pt x="4146591" y="117898"/>
+                </a:lnTo>
+                <a:lnTo>
+                  <a:pt x="4202626" y="161333"/>
+                </a:lnTo>
+                <a:lnTo>
+                  <a:pt x="4258661" y="204769"/>
+                </a:lnTo>
+                <a:lnTo>
+                  <a:pt x="4314696" y="248205"/>
+                </a:lnTo>
+                <a:lnTo>
+                  <a:pt x="4370731" y="291641"/>
+                </a:lnTo>
+                <a:lnTo>
+                  <a:pt x="4426766" y="335077"/>
+                </a:lnTo>
+                <a:lnTo>
+                  <a:pt x="4482801" y="378513"/>
+                </a:lnTo>
+                <a:lnTo>
+                  <a:pt x="4538836" y="421948"/>
+                </a:lnTo>
+                <a:lnTo>
+                  <a:pt x="4594871" y="465384"/>
+                </a:lnTo>
+                <a:lnTo>
+                  <a:pt x="4650906" y="508820"/>
+                </a:lnTo>
+                <a:lnTo>
+                  <a:pt x="4706941" y="552256"/>
+                </a:lnTo>
+                <a:lnTo>
+                  <a:pt x="4762976" y="595692"/>
+                </a:lnTo>
+                <a:lnTo>
+                  <a:pt x="4819011" y="639128"/>
+                </a:lnTo>
+                <a:lnTo>
+                  <a:pt x="4875046" y="682563"/>
+                </a:lnTo>
+                <a:lnTo>
+                  <a:pt x="4931081" y="725999"/>
+                </a:lnTo>
+                <a:lnTo>
+                  <a:pt x="4987116" y="769435"/>
+                </a:lnTo>
+                <a:lnTo>
+                  <a:pt x="5043151" y="812871"/>
+                </a:lnTo>
+                <a:lnTo>
+                  <a:pt x="5099186" y="856307"/>
+                </a:lnTo>
+                <a:lnTo>
+                  <a:pt x="5155221" y="899743"/>
+                </a:lnTo>
+                <a:lnTo>
+                  <a:pt x="5211256" y="943178"/>
+                </a:lnTo>
+                <a:lnTo>
+                  <a:pt x="5267291" y="986614"/>
+                </a:lnTo>
+                <a:lnTo>
+                  <a:pt x="5323326" y="1030050"/>
+                </a:lnTo>
+                <a:lnTo>
+                  <a:pt x="5379361" y="1048666"/>
+                </a:lnTo>
+                <a:lnTo>
+                  <a:pt x="5435396" y="1048666"/>
+                </a:lnTo>
+                <a:lnTo>
+                  <a:pt x="5491431" y="1048666"/>
+                </a:lnTo>
+                <a:lnTo>
+                  <a:pt x="5547466" y="1048666"/>
+                </a:lnTo>
+                <a:lnTo>
+                  <a:pt x="5603501" y="1048666"/>
+                </a:lnTo>
+                <a:lnTo>
+                  <a:pt x="5659536" y="1048666"/>
+                </a:lnTo>
+                <a:lnTo>
+                  <a:pt x="5715571" y="1048666"/>
+                </a:lnTo>
+                <a:lnTo>
+                  <a:pt x="5771606" y="1048666"/>
+                </a:lnTo>
+                <a:lnTo>
+                  <a:pt x="5827641" y="1048666"/>
+                </a:lnTo>
+                <a:lnTo>
+                  <a:pt x="5883676" y="1048666"/>
+                </a:lnTo>
+                <a:lnTo>
+                  <a:pt x="5939711" y="1048666"/>
+                </a:lnTo>
+                <a:lnTo>
+                  <a:pt x="5995746" y="1048666"/>
+                </a:lnTo>
+                <a:lnTo>
+                  <a:pt x="6051781" y="1048666"/>
+                </a:lnTo>
+                <a:lnTo>
+                  <a:pt x="6107816" y="1048666"/>
+                </a:lnTo>
+                <a:lnTo>
+                  <a:pt x="6163851" y="1048666"/>
+                </a:lnTo>
+                <a:lnTo>
+                  <a:pt x="6219886" y="1048666"/>
+                </a:lnTo>
+                <a:lnTo>
+                  <a:pt x="6275921" y="1048666"/>
+                </a:lnTo>
+                <a:lnTo>
+                  <a:pt x="6331956" y="1048666"/>
+                </a:lnTo>
+                <a:lnTo>
+                  <a:pt x="6387991" y="1048666"/>
+                </a:lnTo>
+              </a:path>
+            </a:pathLst>
+          </a:custGeom>
+          <a:noFill/>
+          <a:ln w="38100">
+            <a:solidFill>
+              <a:srgbClr val="F28BA0"/>
+            </a:solidFill>
+          </a:ln>
+          <a:effectLst/>
+        </p:spPr>
+        <p:txBody>
+          <a:bodyPr rtlCol="0" anchor="ctr"/>
+          <a:lstStyle/>
+          <a:p>
+            <a:pPr algn="ctr"/>
+          </a:p>
+        </p:txBody>
+      </p:sp>
+      <p:cxnSp>
+        <p:nvCxnSpPr>
+          <p:cNvPr id="34" name="C3-E26 line 32" descr="sci-ppt:o032"/>
+          <p:cNvCxnSpPr/>
+          <p:nvPr/>
+        </p:nvCxnSpPr>
+        <p:spPr>
+          <a:xfrm>
+            <a:off x="914400" y="3890121"/>
+            <a:ext cx="6400800" cy="0"/>
+          </a:xfrm>
+          <a:prstGeom prst="line">
+            <a:avLst/>
+          </a:prstGeom>
+          <a:ln w="15240">
+            <a:solidFill>
+              <a:srgbClr val="F28BA0"/>
+            </a:solidFill>
+            <a:prstDash val="dash"/>
+          </a:ln>
+          <a:effectLst/>
+        </p:spPr>
+      </p:cxnSp>
+      <p:sp>
+        <p:nvSpPr>
+          <p:cNvPr id="35" name="C3-E26 text 33" descr="sci-ppt:o033"/>
+          <p:cNvSpPr txBox="1"/>
+          <p:nvPr/>
+        </p:nvSpPr>
+        <p:spPr>
+          <a:xfrm>
+            <a:off x="5188077" y="2146852"/>
+            <a:ext cx="2011680" cy="402081"/>
+          </a:xfrm>
+          <a:prstGeom prst="rect">
+            <a:avLst/>
+          </a:prstGeom>
+          <a:noFill/>
+          <a:effectLst/>
+        </p:spPr>
+        <p:txBody>
+          <a:bodyPr wrap="none" lIns="18288" rIns="18288" tIns="18288" bIns="18288" anchor="t">
             <a:spAutoFit/>
           </a:bodyPr>
           <a:lstStyle/>
@@ -3597,33 +5484,9 @@
                 </a:solidFill>
                 <a:latin typeface="Arial"/>
               </a:rPr>
-              <a:t>• A_o fixed sensor footprint</a:t>
-            </a:r>
-          </a:p>
-        </p:txBody>
-      </p:sp>
-      <p:sp>
-        <p:nvSpPr>
-          <p:cNvPr id="17" name="C3-E26 text 15" descr="sci-ppt:o015"/>
-          <p:cNvSpPr txBox="1"/>
-          <p:nvPr/>
-        </p:nvSpPr>
-        <p:spPr>
-          <a:xfrm>
-            <a:off x="6217920" y="4096512"/>
-            <a:ext cx="5715000" cy="246888"/>
-          </a:xfrm>
-          <a:prstGeom prst="rect">
-            <a:avLst/>
-          </a:prstGeom>
-          <a:noFill/>
-          <a:effectLst/>
-        </p:spPr>
-        <p:txBody>
-          <a:bodyPr wrap="square" lIns="27432" rIns="27432" tIns="18288" bIns="18288" anchor="ctr">
-            <a:spAutoFit/>
-          </a:bodyPr>
-          <a:lstStyle/>
+              <a:t>dashed grey:</a:t>
+            </a:r>
+          </a:p>
           <a:p>
             <a:pPr algn="l">
               <a:spcAft>
@@ -3637,21 +5500,21 @@
                 </a:solidFill>
                 <a:latin typeface="Arial"/>
               </a:rPr>
-              <a:t>• τ_o averaging window</a:t>
-            </a:r>
-          </a:p>
-        </p:txBody>
-      </p:sp>
-      <p:sp>
-        <p:nvSpPr>
-          <p:cNvPr id="18" name="C3-E26 text 16" descr="sci-ppt:o016"/>
+              <a:t>the underlying pulse</a:t>
+            </a:r>
+          </a:p>
+        </p:txBody>
+      </p:sp>
+      <p:sp>
+        <p:nvSpPr>
+          <p:cNvPr id="36" name="C3-E26 text 34" descr="sci-ppt:o034"/>
           <p:cNvSpPr txBox="1"/>
           <p:nvPr/>
         </p:nvSpPr>
         <p:spPr>
           <a:xfrm>
-            <a:off x="320040" y="4329684"/>
-            <a:ext cx="5715000" cy="246888"/>
+            <a:off x="2907792" y="2365513"/>
+            <a:ext cx="1463040" cy="223900"/>
           </a:xfrm>
           <a:prstGeom prst="rect">
             <a:avLst/>
@@ -3660,7 +5523,279 @@
           <a:effectLst/>
         </p:spPr>
         <p:txBody>
-          <a:bodyPr wrap="square" lIns="27432" rIns="27432" tIns="18288" bIns="18288" anchor="ctr">
+          <a:bodyPr wrap="none" lIns="18288" rIns="18288" tIns="18288" bIns="18288" anchor="t">
+            <a:spAutoFit/>
+          </a:bodyPr>
+          <a:lstStyle/>
+          <a:p>
+            <a:pPr algn="l">
+              <a:spcAft>
+                <a:spcPts val="0"/>
+              </a:spcAft>
+            </a:pPr>
+            <a:r>
+              <a:rPr sz="1150" b="0" i="0">
+                <a:solidFill>
+                  <a:srgbClr val="8EDBD4"/>
+                </a:solidFill>
+                <a:latin typeface="Arial"/>
+              </a:rPr>
+              <a:t>τₒ = 10 ns</a:t>
+            </a:r>
+          </a:p>
+        </p:txBody>
+      </p:sp>
+      <p:sp>
+        <p:nvSpPr>
+          <p:cNvPr id="37" name="C3-E26 text 35" descr="sci-ppt:o035"/>
+          <p:cNvSpPr txBox="1"/>
+          <p:nvPr/>
+        </p:nvSpPr>
+        <p:spPr>
+          <a:xfrm>
+            <a:off x="4107941" y="3109755"/>
+            <a:ext cx="2560320" cy="223900"/>
+          </a:xfrm>
+          <a:prstGeom prst="rect">
+            <a:avLst/>
+          </a:prstGeom>
+          <a:noFill/>
+          <a:effectLst/>
+        </p:spPr>
+        <p:txBody>
+          <a:bodyPr wrap="none" lIns="18288" rIns="18288" tIns="18288" bIns="18288" anchor="t">
+            <a:spAutoFit/>
+          </a:bodyPr>
+          <a:lstStyle/>
+          <a:p>
+            <a:pPr algn="l">
+              <a:spcAft>
+                <a:spcPts val="0"/>
+              </a:spcAft>
+            </a:pPr>
+            <a:r>
+              <a:rPr sz="1150" b="0" i="0">
+                <a:solidFill>
+                  <a:srgbClr val="F2B880"/>
+                </a:solidFill>
+                <a:latin typeface="Arial"/>
+              </a:rPr>
+              <a:t>τₒ = 33.8 ns: bound = 1</a:t>
+            </a:r>
+          </a:p>
+        </p:txBody>
+      </p:sp>
+      <p:sp>
+        <p:nvSpPr>
+          <p:cNvPr id="38" name="C3-E26 text 36" descr="sci-ppt:o036"/>
+          <p:cNvSpPr txBox="1"/>
+          <p:nvPr/>
+        </p:nvSpPr>
+        <p:spPr>
+          <a:xfrm>
+            <a:off x="3387852" y="4474198"/>
+            <a:ext cx="2560320" cy="223900"/>
+          </a:xfrm>
+          <a:prstGeom prst="rect">
+            <a:avLst/>
+          </a:prstGeom>
+          <a:noFill/>
+          <a:effectLst/>
+        </p:spPr>
+        <p:txBody>
+          <a:bodyPr wrap="none" lIns="18288" rIns="18288" tIns="18288" bIns="18288" anchor="t">
+            <a:spAutoFit/>
+          </a:bodyPr>
+          <a:lstStyle/>
+          <a:p>
+            <a:pPr algn="l">
+              <a:spcAft>
+                <a:spcPts val="0"/>
+              </a:spcAft>
+            </a:pPr>
+            <a:r>
+              <a:rPr sz="1150" b="0" i="0">
+                <a:solidFill>
+                  <a:srgbClr val="F28BA0"/>
+                </a:solidFill>
+                <a:latin typeface="Arial"/>
+              </a:rPr>
+              <a:t>τₒ = 100 ns: bound = 0.34</a:t>
+            </a:r>
+          </a:p>
+        </p:txBody>
+      </p:sp>
+      <p:sp>
+        <p:nvSpPr>
+          <p:cNvPr id="39" name="C3-E26 round_rect 37" descr="sci-ppt:o037"/>
+          <p:cNvSpPr/>
+          <p:nvPr/>
+        </p:nvSpPr>
+        <p:spPr>
+          <a:xfrm>
+            <a:off x="7589520" y="1371600"/>
+            <a:ext cx="4251960" cy="3566160"/>
+          </a:xfrm>
+          <a:prstGeom prst="roundRect">
+            <a:avLst/>
+          </a:prstGeom>
+          <a:solidFill>
+            <a:srgbClr val="213E4B"/>
+          </a:solidFill>
+          <a:ln w="20320">
+            <a:solidFill>
+              <a:srgbClr val="8EDBD4"/>
+            </a:solidFill>
+          </a:ln>
+          <a:effectLst/>
+        </p:spPr>
+        <p:txBody>
+          <a:bodyPr rtlCol="0" anchor="ctr"/>
+          <a:lstStyle/>
+          <a:p>
+            <a:pPr algn="ctr"/>
+          </a:p>
+        </p:txBody>
+      </p:sp>
+      <p:sp>
+        <p:nvSpPr>
+          <p:cNvPr id="40" name="C3-E26 text 38" descr="sci-ppt:o038"/>
+          <p:cNvSpPr txBox="1"/>
+          <p:nvPr/>
+        </p:nvSpPr>
+        <p:spPr>
+          <a:xfrm>
+            <a:off x="7699248" y="1426464"/>
+            <a:ext cx="4032504" cy="247142"/>
+          </a:xfrm>
+          <a:prstGeom prst="rect">
+            <a:avLst/>
+          </a:prstGeom>
+          <a:noFill/>
+          <a:effectLst/>
+        </p:spPr>
+        <p:txBody>
+          <a:bodyPr wrap="none" lIns="18288" rIns="18288" tIns="18288" bIns="18288" anchor="t">
+            <a:spAutoFit/>
+          </a:bodyPr>
+          <a:lstStyle/>
+          <a:p>
+            <a:pPr algn="l">
+              <a:spcAft>
+                <a:spcPts val="0"/>
+              </a:spcAft>
+            </a:pPr>
+            <a:r>
+              <a:rPr sz="1300" b="1" i="0">
+                <a:solidFill>
+                  <a:srgbClr val="8EDBD4"/>
+                </a:solidFill>
+                <a:latin typeface="Arial"/>
+              </a:rPr>
+              <a:t>A maximum needs an observer</a:t>
+            </a:r>
+          </a:p>
+        </p:txBody>
+      </p:sp>
+      <p:sp>
+        <p:nvSpPr>
+          <p:cNvPr id="41" name="C3-E26 text 39" descr="sci-ppt:o039"/>
+          <p:cNvSpPr txBox="1"/>
+          <p:nvPr/>
+        </p:nvSpPr>
+        <p:spPr>
+          <a:xfrm>
+            <a:off x="7726679" y="1828800"/>
+            <a:ext cx="4023360" cy="231648"/>
+          </a:xfrm>
+          <a:prstGeom prst="rect">
+            <a:avLst/>
+          </a:prstGeom>
+          <a:noFill/>
+          <a:effectLst/>
+        </p:spPr>
+        <p:txBody>
+          <a:bodyPr wrap="none" lIns="18288" rIns="18288" tIns="18288" bIns="18288" anchor="t">
+            <a:spAutoFit/>
+          </a:bodyPr>
+          <a:lstStyle/>
+          <a:p>
+            <a:pPr algn="l">
+              <a:spcAft>
+                <a:spcPts val="0"/>
+              </a:spcAft>
+            </a:pPr>
+            <a:r>
+              <a:rPr sz="1200" b="1" i="0">
+                <a:solidFill>
+                  <a:srgbClr val="E7F0F3"/>
+                </a:solidFill>
+                <a:latin typeface="Arial"/>
+              </a:rPr>
+              <a:t>p_obs(t) = (1/A_oτₒ) ∫∫ (p − p_ref) dA dξ</a:t>
+            </a:r>
+          </a:p>
+        </p:txBody>
+      </p:sp>
+      <p:sp>
+        <p:nvSpPr>
+          <p:cNvPr id="42" name="C3-E26 text 40" descr="sci-ppt:o040"/>
+          <p:cNvSpPr txBox="1"/>
+          <p:nvPr/>
+        </p:nvSpPr>
+        <p:spPr>
+          <a:xfrm>
+            <a:off x="7726679" y="2377440"/>
+            <a:ext cx="4023360" cy="247142"/>
+          </a:xfrm>
+          <a:prstGeom prst="rect">
+            <a:avLst/>
+          </a:prstGeom>
+          <a:noFill/>
+          <a:effectLst/>
+        </p:spPr>
+        <p:txBody>
+          <a:bodyPr wrap="none" lIns="18288" rIns="18288" tIns="18288" bIns="18288" anchor="t">
+            <a:spAutoFit/>
+          </a:bodyPr>
+          <a:lstStyle/>
+          <a:p>
+            <a:pPr algn="l">
+              <a:spcAft>
+                <a:spcPts val="0"/>
+              </a:spcAft>
+            </a:pPr>
+            <a:r>
+              <a:rPr sz="1300" b="1" i="0">
+                <a:solidFill>
+                  <a:srgbClr val="F2B880"/>
+                </a:solidFill>
+                <a:latin typeface="Arial"/>
+              </a:rPr>
+              <a:t>0 ≤ p_obs ≤ J_rec / (Aₒ τₒ)</a:t>
+            </a:r>
+          </a:p>
+        </p:txBody>
+      </p:sp>
+      <p:sp>
+        <p:nvSpPr>
+          <p:cNvPr id="43" name="C3-E26 text 41" descr="sci-ppt:o041"/>
+          <p:cNvSpPr txBox="1"/>
+          <p:nvPr/>
+        </p:nvSpPr>
+        <p:spPr>
+          <a:xfrm>
+            <a:off x="7726679" y="2926080"/>
+            <a:ext cx="4023360" cy="580263"/>
+          </a:xfrm>
+          <a:prstGeom prst="rect">
+            <a:avLst/>
+          </a:prstGeom>
+          <a:noFill/>
+          <a:effectLst/>
+        </p:spPr>
+        <p:txBody>
+          <a:bodyPr wrap="none" lIns="18288" rIns="18288" tIns="18288" bIns="18288" anchor="t">
             <a:spAutoFit/>
           </a:bodyPr>
           <a:lstStyle/>
@@ -3677,33 +5812,9 @@
                 </a:solidFill>
                 <a:latin typeface="Arial"/>
               </a:rPr>
-              <a:t>• p(x,ξ) local surface pressure</a:t>
-            </a:r>
-          </a:p>
-        </p:txBody>
-      </p:sp>
-      <p:sp>
-        <p:nvSpPr>
-          <p:cNvPr id="19" name="C3-E26 text 17" descr="sci-ppt:o017"/>
-          <p:cNvSpPr txBox="1"/>
-          <p:nvPr/>
-        </p:nvSpPr>
-        <p:spPr>
-          <a:xfrm>
-            <a:off x="6217920" y="4329684"/>
-            <a:ext cx="5715000" cy="246888"/>
-          </a:xfrm>
-          <a:prstGeom prst="rect">
-            <a:avLst/>
-          </a:prstGeom>
-          <a:noFill/>
-          <a:effectLst/>
-        </p:spPr>
-        <p:txBody>
-          <a:bodyPr wrap="square" lIns="27432" rIns="27432" tIns="18288" bIns="18288" anchor="ctr">
-            <a:spAutoFit/>
-          </a:bodyPr>
-          <a:lstStyle/>
+              <a:t>valid for nonnegative excess pressure, negligible</a:t>
+            </a:r>
+          </a:p>
           <a:p>
             <a:pPr algn="l">
               <a:spcAft>
@@ -3717,33 +5828,9 @@
                 </a:solidFill>
                 <a:latin typeface="Arial"/>
               </a:rPr>
-              <a:t>• p_ref reference pressure</a:t>
-            </a:r>
-          </a:p>
-        </p:txBody>
-      </p:sp>
-      <p:sp>
-        <p:nvSpPr>
-          <p:cNvPr id="20" name="C3-E26 text 18" descr="sci-ppt:o018"/>
-          <p:cNvSpPr txBox="1"/>
-          <p:nvPr/>
-        </p:nvSpPr>
-        <p:spPr>
-          <a:xfrm>
-            <a:off x="320040" y="4562856"/>
-            <a:ext cx="5715000" cy="246888"/>
-          </a:xfrm>
-          <a:prstGeom prst="rect">
-            <a:avLst/>
-          </a:prstGeom>
-          <a:noFill/>
-          <a:effectLst/>
-        </p:spPr>
-        <p:txBody>
-          <a:bodyPr wrap="square" lIns="27432" rIns="27432" tIns="18288" bIns="18288" anchor="ctr">
-            <a:spAutoFit/>
-          </a:bodyPr>
-          <a:lstStyle/>
+              <a:t>normal viscous stress and the full-event footprint</a:t>
+            </a:r>
+          </a:p>
           <a:p>
             <a:pPr algn="l">
               <a:spcAft>
@@ -3757,21 +5844,21 @@
                 </a:solidFill>
                 <a:latin typeface="Arial"/>
               </a:rPr>
-              <a:t>• p_obs(t) observed mean</a:t>
-            </a:r>
-          </a:p>
-        </p:txBody>
-      </p:sp>
-      <p:sp>
-        <p:nvSpPr>
-          <p:cNvPr id="21" name="C3-E26 text 19" descr="sci-ppt:o019"/>
+              <a:t>impulse J_rec</a:t>
+            </a:r>
+          </a:p>
+        </p:txBody>
+      </p:sp>
+      <p:sp>
+        <p:nvSpPr>
+          <p:cNvPr id="44" name="C3-E26 text 42" descr="sci-ppt:o042"/>
           <p:cNvSpPr txBox="1"/>
           <p:nvPr/>
         </p:nvSpPr>
         <p:spPr>
           <a:xfrm>
-            <a:off x="6217920" y="4562856"/>
-            <a:ext cx="5715000" cy="246888"/>
+            <a:off x="7726679" y="4023360"/>
+            <a:ext cx="4023360" cy="417576"/>
           </a:xfrm>
           <a:prstGeom prst="rect">
             <a:avLst/>
@@ -3780,7 +5867,7 @@
           <a:effectLst/>
         </p:spPr>
         <p:txBody>
-          <a:bodyPr wrap="square" lIns="27432" rIns="27432" tIns="18288" bIns="18288" anchor="ctr">
+          <a:bodyPr wrap="none" lIns="18288" rIns="18288" tIns="18288" bIns="18288" anchor="t">
             <a:spAutoFit/>
           </a:bodyPr>
           <a:lstStyle/>
@@ -3791,27 +5878,43 @@
               </a:spcAft>
             </a:pPr>
             <a:r>
-              <a:rPr sz="1150" b="0" i="0">
+              <a:rPr sz="1200" b="0" i="0">
                 <a:solidFill>
-                  <a:srgbClr val="B4C7D2"/>
+                  <a:srgbClr val="E7F0F3"/>
                 </a:solidFill>
                 <a:latin typeface="Arial"/>
               </a:rPr>
-              <a:t>• J_rec total footprint impulse</a:t>
-            </a:r>
-          </a:p>
-        </p:txBody>
-      </p:sp>
-      <p:sp>
-        <p:nvSpPr>
-          <p:cNvPr id="22" name="C3-E26 text 20" descr="sci-ppt:o020"/>
+              <a:t>Same pulse, three observers: the reported peak</a:t>
+            </a:r>
+          </a:p>
+          <a:p>
+            <a:pPr algn="l">
+              <a:spcAft>
+                <a:spcPts val="0"/>
+              </a:spcAft>
+            </a:pPr>
+            <a:r>
+              <a:rPr sz="1200" b="0" i="0">
+                <a:solidFill>
+                  <a:srgbClr val="E7F0F3"/>
+                </a:solidFill>
+                <a:latin typeface="Arial"/>
+              </a:rPr>
+              <a:t>changes by a factor 3 with the window alone.</a:t>
+            </a:r>
+          </a:p>
+        </p:txBody>
+      </p:sp>
+      <p:sp>
+        <p:nvSpPr>
+          <p:cNvPr id="45" name="C3-E26 text 43" descr="sci-ppt:o043"/>
           <p:cNvSpPr txBox="1"/>
           <p:nvPr/>
         </p:nvSpPr>
         <p:spPr>
           <a:xfrm>
-            <a:off x="320040" y="4796028"/>
-            <a:ext cx="5715000" cy="246888"/>
+            <a:off x="914400" y="5486400"/>
+            <a:ext cx="10972800" cy="417576"/>
           </a:xfrm>
           <a:prstGeom prst="rect">
             <a:avLst/>
@@ -3820,7 +5923,7 @@
           <a:effectLst/>
         </p:spPr>
         <p:txBody>
-          <a:bodyPr wrap="square" lIns="27432" rIns="27432" tIns="18288" bIns="18288" anchor="ctr">
+          <a:bodyPr wrap="none" lIns="18288" rIns="18288" tIns="18288" bIns="18288" anchor="t">
             <a:spAutoFit/>
           </a:bodyPr>
           <a:lstStyle/>
@@ -3831,27 +5934,43 @@
               </a:spcAft>
             </a:pPr>
             <a:r>
-              <a:rPr sz="1150" b="0" i="0">
+              <a:rPr sz="1200" b="0" i="0">
                 <a:solidFill>
-                  <a:srgbClr val="B4C7D2"/>
+                  <a:srgbClr val="E7F0F3"/>
                 </a:solidFill>
                 <a:latin typeface="Arial"/>
               </a:rPr>
-              <a:t>• dA area element; x, ξ, t</a:t>
-            </a:r>
-          </a:p>
-        </p:txBody>
-      </p:sp>
-      <p:sp>
-        <p:nvSpPr>
-          <p:cNvPr id="23" name="C3-E26 text 21" descr="sci-ppt:o021"/>
+              <a:t>Dashed horizontal lines are the bound J_rec/(A_oτₒ) for each window (the 10 ns bound lies above the plot). Quote location, footprint</a:t>
+            </a:r>
+          </a:p>
+          <a:p>
+            <a:pPr algn="l">
+              <a:spcAft>
+                <a:spcPts val="0"/>
+              </a:spcAft>
+            </a:pPr>
+            <a:r>
+              <a:rPr sz="1200" b="0" i="0">
+                <a:solidFill>
+                  <a:srgbClr val="E7F0F3"/>
+                </a:solidFill>
+                <a:latin typeface="Arial"/>
+              </a:rPr>
+              <a:t>and window with any value.</a:t>
+            </a:r>
+          </a:p>
+        </p:txBody>
+      </p:sp>
+      <p:sp>
+        <p:nvSpPr>
+          <p:cNvPr id="46" name="C3-E26 text 44" descr="sci-ppt:o044"/>
           <p:cNvSpPr txBox="1"/>
           <p:nvPr/>
         </p:nvSpPr>
         <p:spPr>
           <a:xfrm>
-            <a:off x="320040" y="5596128"/>
-            <a:ext cx="11430000" cy="292608"/>
+            <a:off x="320040" y="6510528"/>
+            <a:ext cx="11521440" cy="200660"/>
           </a:xfrm>
           <a:prstGeom prst="rect">
             <a:avLst/>
@@ -3860,87 +5979,7 @@
           <a:effectLst/>
         </p:spPr>
         <p:txBody>
-          <a:bodyPr wrap="square" lIns="27432" rIns="27432" tIns="18288" bIns="18288" anchor="ctr">
-            <a:spAutoFit/>
-          </a:bodyPr>
-          <a:lstStyle/>
-          <a:p>
-            <a:pPr algn="l">
-              <a:spcAft>
-                <a:spcPts val="0"/>
-              </a:spcAft>
-            </a:pPr>
-            <a:r>
-              <a:rPr sz="1150" b="0" i="0">
-                <a:solidFill>
-                  <a:srgbClr val="8EDBD4"/>
-                </a:solidFill>
-                <a:latin typeface="Arial"/>
-              </a:rPr>
-              <a:t>Fluid, exposed surface and release interface are different locations</a:t>
-            </a:r>
-          </a:p>
-        </p:txBody>
-      </p:sp>
-      <p:sp>
-        <p:nvSpPr>
-          <p:cNvPr id="24" name="C3-E26 text 22" descr="sci-ppt:o022"/>
-          <p:cNvSpPr txBox="1"/>
-          <p:nvPr/>
-        </p:nvSpPr>
-        <p:spPr>
-          <a:xfrm>
-            <a:off x="320040" y="5870448"/>
-            <a:ext cx="11430000" cy="292608"/>
-          </a:xfrm>
-          <a:prstGeom prst="rect">
-            <a:avLst/>
-          </a:prstGeom>
-          <a:noFill/>
-          <a:effectLst/>
-        </p:spPr>
-        <p:txBody>
-          <a:bodyPr wrap="square" lIns="27432" rIns="27432" tIns="18288" bIns="18288" anchor="ctr">
-            <a:spAutoFit/>
-          </a:bodyPr>
-          <a:lstStyle/>
-          <a:p>
-            <a:pPr algn="l">
-              <a:spcAft>
-                <a:spcPts val="0"/>
-              </a:spcAft>
-            </a:pPr>
-            <a:r>
-              <a:rPr sz="1150" b="0" i="0">
-                <a:solidFill>
-                  <a:srgbClr val="8EDBD4"/>
-                </a:solidFill>
-                <a:latin typeface="Arial"/>
-              </a:rPr>
-              <a:t>Bandwidth and sign convention belong to the observation</a:t>
-            </a:r>
-          </a:p>
-        </p:txBody>
-      </p:sp>
-      <p:sp>
-        <p:nvSpPr>
-          <p:cNvPr id="25" name="C3-E26 text 23" descr="sci-ppt:o023"/>
-          <p:cNvSpPr txBox="1"/>
-          <p:nvPr/>
-        </p:nvSpPr>
-        <p:spPr>
-          <a:xfrm>
-            <a:off x="320040" y="6473952"/>
-            <a:ext cx="11430000" cy="256032"/>
-          </a:xfrm>
-          <a:prstGeom prst="rect">
-            <a:avLst/>
-          </a:prstGeom>
-          <a:noFill/>
-          <a:effectLst/>
-        </p:spPr>
-        <p:txBody>
-          <a:bodyPr wrap="square" lIns="27432" rIns="27432" tIns="18288" bIns="18288" anchor="ctr">
+          <a:bodyPr wrap="none" lIns="18288" rIns="18288" tIns="18288" bIns="18288" anchor="t">
             <a:spAutoFit/>
           </a:bodyPr>
           <a:lstStyle/>
@@ -3957,7 +5996,7 @@
                 </a:solidFill>
                 <a:latin typeface="Arial"/>
               </a:rPr>
-              <a:t>Model schematic; geometry is not to scale.</a:t>
+              <a:t>Observer and bound of Eq. C3-E26 for the declared rectangular pulse.</a:t>
             </a:r>
           </a:p>
         </p:txBody>
